--- a/slides/CSC336-Lecture-17-Midterm-Review.pptx
+++ b/slides/CSC336-Lecture-17-Midterm-Review.pptx
@@ -2371,79 +2371,44 @@
       </p:sp>
       <p:sp>
         <p:nvSpPr>
-          <p:cNvPr id="6" name="Text 4"/>
-          <p:cNvSpPr txBox="1"/>
-          <p:nvPr/>
-        </p:nvSpPr>
-        <p:spPr>
-          <a:xfrm>
-            <a:off x="640080" y="6446520"/>
-            <a:ext cx="8686800" cy="292608"/>
-          </a:xfrm>
-          <a:prstGeom prst="rect">
-            <a:avLst/>
-          </a:prstGeom>
-          <a:noFill/>
-          <a:ln/>
-        </p:spPr>
-        <p:txBody>
-          <a:bodyPr wrap="square" lIns="0" tIns="0" rIns="0" bIns="0" rtlCol="0" anchor="ctr"/>
-          <a:lstStyle/>
-          <a:p>
-            <a:pPr algn="l" indent="0" marL="0">
-              <a:buNone/>
-            </a:pPr>
-            <a:r>
-              <a:rPr lang="en-US" sz="900" dirty="0">
-                <a:solidFill>
-                  <a:srgbClr val="9AA3D8"/>
-                </a:solidFill>
-                <a:latin typeface="Calibri" pitchFamily="34" charset="0"/>
-                <a:ea typeface="Calibri" pitchFamily="34" charset="-122"/>
-                <a:cs typeface="Calibri" pitchFamily="34" charset="-120"/>
-              </a:rPr>
-              <a:t>Usman Akram  •  COMSATS University Islamabad</a:t>
-            </a:r>
-            <a:endParaRPr lang="en-US" sz="900" dirty="0"/>
-          </a:p>
-        </p:txBody>
-      </p:sp>
-      <p:sp>
-        <p:nvSpPr>
-          <p:cNvPr id="7" name="Text 5"/>
-          <p:cNvSpPr txBox="1"/>
-          <p:nvPr/>
-        </p:nvSpPr>
-        <p:spPr>
-          <a:xfrm>
-            <a:off x="11155680" y="6446520"/>
-            <a:ext cx="457200" cy="292608"/>
-          </a:xfrm>
-          <a:prstGeom prst="rect">
-            <a:avLst/>
-          </a:prstGeom>
-          <a:noFill/>
-          <a:ln/>
-        </p:spPr>
-        <p:txBody>
-          <a:bodyPr wrap="square" lIns="0" tIns="0" rIns="0" bIns="0" rtlCol="0" anchor="ctr"/>
-          <a:lstStyle/>
-          <a:p>
-            <a:pPr algn="r" indent="0" marL="0">
-              <a:buNone/>
-            </a:pPr>
-            <a:r>
-              <a:rPr lang="en-US" sz="900" dirty="0">
-                <a:solidFill>
-                  <a:srgbClr val="9AA3D8"/>
-                </a:solidFill>
-                <a:latin typeface="Calibri" pitchFamily="34" charset="0"/>
-                <a:ea typeface="Calibri" pitchFamily="34" charset="-122"/>
-                <a:cs typeface="Calibri" pitchFamily="34" charset="-120"/>
-              </a:rPr>
-              <a:t>1</a:t>
-            </a:r>
-            <a:endParaRPr lang="en-US" sz="900" dirty="0"/>
+          <p:cNvPr id="8" name="cuinotes-footer-mark"/>
+          <p:cNvSpPr txBox="1"/>
+          <p:nvPr/>
+        </p:nvSpPr>
+        <p:spPr>
+          <a:xfrm>
+            <a:off x="9951720" y="6455664"/>
+            <a:ext cx="2011680" cy="292608"/>
+          </a:xfrm>
+          <a:prstGeom prst="rect">
+            <a:avLst/>
+          </a:prstGeom>
+          <a:noFill/>
+        </p:spPr>
+        <p:txBody>
+          <a:bodyPr wrap="none" lIns="0" rIns="0" tIns="0" bIns="0">
+            <a:spAutoFit/>
+          </a:bodyPr>
+          <a:lstStyle/>
+          <a:p>
+            <a:pPr algn="r"/>
+            <a:r>
+              <a:rPr sz="1000">
+                <a:solidFill>
+                  <a:srgbClr val="8A939B"/>
+                </a:solidFill>
+                <a:hlinkClick r:id="rId3"/>
+              </a:rPr>
+              <a:t>cuinotes.com</a:t>
+            </a:r>
+            <a:r>
+              <a:rPr sz="1000">
+                <a:solidFill>
+                  <a:srgbClr val="8A939B"/>
+                </a:solidFill>
+              </a:rPr>
+              <a:t>  ·  1</a:t>
+            </a:r>
           </a:p>
         </p:txBody>
       </p:sp>
@@ -2576,6 +2541,10 @@
           </a:solidFill>
           <a:ln/>
         </p:spPr>
+        <p:txBody>
+          <a:bodyPr/>
+          <a:p/>
+        </p:txBody>
       </p:sp>
       <p:sp>
         <p:nvSpPr>
@@ -2635,6 +2604,10 @@
           </a:solidFill>
           <a:ln/>
         </p:spPr>
+        <p:txBody>
+          <a:bodyPr/>
+          <a:p/>
+        </p:txBody>
       </p:sp>
       <p:sp>
         <p:nvSpPr>
@@ -2694,6 +2667,10 @@
           </a:solidFill>
           <a:ln/>
         </p:spPr>
+        <p:txBody>
+          <a:bodyPr/>
+          <a:p/>
+        </p:txBody>
       </p:sp>
       <p:sp>
         <p:nvSpPr>
@@ -2753,6 +2730,10 @@
           </a:solidFill>
           <a:ln/>
         </p:spPr>
+        <p:txBody>
+          <a:bodyPr/>
+          <a:p/>
+        </p:txBody>
       </p:sp>
       <p:sp>
         <p:nvSpPr>
@@ -2812,6 +2793,10 @@
           </a:solidFill>
           <a:ln/>
         </p:spPr>
+        <p:txBody>
+          <a:bodyPr/>
+          <a:p/>
+        </p:txBody>
       </p:sp>
       <p:sp>
         <p:nvSpPr>
@@ -2871,6 +2856,10 @@
           </a:solidFill>
           <a:ln/>
         </p:spPr>
+        <p:txBody>
+          <a:bodyPr/>
+          <a:p/>
+        </p:txBody>
       </p:sp>
       <p:sp>
         <p:nvSpPr>
@@ -2913,79 +2902,44 @@
       </p:sp>
       <p:sp>
         <p:nvSpPr>
-          <p:cNvPr id="16" name="Text 14"/>
-          <p:cNvSpPr txBox="1"/>
-          <p:nvPr/>
-        </p:nvSpPr>
-        <p:spPr>
-          <a:xfrm>
-            <a:off x="640080" y="6446520"/>
-            <a:ext cx="8686800" cy="292608"/>
-          </a:xfrm>
-          <a:prstGeom prst="rect">
-            <a:avLst/>
-          </a:prstGeom>
-          <a:noFill/>
-          <a:ln/>
-        </p:spPr>
-        <p:txBody>
-          <a:bodyPr wrap="square" lIns="0" tIns="0" rIns="0" bIns="0" rtlCol="0" anchor="ctr"/>
-          <a:lstStyle/>
-          <a:p>
-            <a:pPr algn="l" indent="0" marL="0">
-              <a:buNone/>
-            </a:pPr>
-            <a:r>
-              <a:rPr lang="en-US" sz="900" dirty="0">
-                <a:solidFill>
-                  <a:srgbClr val="5D5D72"/>
-                </a:solidFill>
-                <a:latin typeface="Calibri" pitchFamily="34" charset="0"/>
-                <a:ea typeface="Calibri" pitchFamily="34" charset="-122"/>
-                <a:cs typeface="Calibri" pitchFamily="34" charset="-120"/>
-              </a:rPr>
-              <a:t>Usman Akram  •  COMSATS University Islamabad</a:t>
-            </a:r>
-            <a:endParaRPr lang="en-US" sz="900" dirty="0"/>
-          </a:p>
-        </p:txBody>
-      </p:sp>
-      <p:sp>
-        <p:nvSpPr>
-          <p:cNvPr id="17" name="Text 15"/>
-          <p:cNvSpPr txBox="1"/>
-          <p:nvPr/>
-        </p:nvSpPr>
-        <p:spPr>
-          <a:xfrm>
-            <a:off x="11155680" y="6446520"/>
-            <a:ext cx="457200" cy="292608"/>
-          </a:xfrm>
-          <a:prstGeom prst="rect">
-            <a:avLst/>
-          </a:prstGeom>
-          <a:noFill/>
-          <a:ln/>
-        </p:spPr>
-        <p:txBody>
-          <a:bodyPr wrap="square" lIns="0" tIns="0" rIns="0" bIns="0" rtlCol="0" anchor="ctr"/>
-          <a:lstStyle/>
-          <a:p>
-            <a:pPr algn="r" indent="0" marL="0">
-              <a:buNone/>
-            </a:pPr>
-            <a:r>
-              <a:rPr lang="en-US" sz="900" dirty="0">
-                <a:solidFill>
-                  <a:srgbClr val="5D5D72"/>
-                </a:solidFill>
-                <a:latin typeface="Calibri" pitchFamily="34" charset="0"/>
-                <a:ea typeface="Calibri" pitchFamily="34" charset="-122"/>
-                <a:cs typeface="Calibri" pitchFamily="34" charset="-120"/>
-              </a:rPr>
-              <a:t>10</a:t>
-            </a:r>
-            <a:endParaRPr lang="en-US" sz="900" dirty="0"/>
+          <p:cNvPr id="18" name="cuinotes-footer-mark"/>
+          <p:cNvSpPr txBox="1"/>
+          <p:nvPr/>
+        </p:nvSpPr>
+        <p:spPr>
+          <a:xfrm>
+            <a:off x="9951720" y="6455664"/>
+            <a:ext cx="2011680" cy="292608"/>
+          </a:xfrm>
+          <a:prstGeom prst="rect">
+            <a:avLst/>
+          </a:prstGeom>
+          <a:noFill/>
+        </p:spPr>
+        <p:txBody>
+          <a:bodyPr wrap="none" lIns="0" rIns="0" tIns="0" bIns="0">
+            <a:spAutoFit/>
+          </a:bodyPr>
+          <a:lstStyle/>
+          <a:p>
+            <a:pPr algn="r"/>
+            <a:r>
+              <a:rPr sz="1000">
+                <a:solidFill>
+                  <a:srgbClr val="8A939B"/>
+                </a:solidFill>
+                <a:hlinkClick r:id="rId3"/>
+              </a:rPr>
+              <a:t>cuinotes.com</a:t>
+            </a:r>
+            <a:r>
+              <a:rPr sz="1000">
+                <a:solidFill>
+                  <a:srgbClr val="8A939B"/>
+                </a:solidFill>
+              </a:rPr>
+              <a:t>  ·  10</a:t>
+            </a:r>
           </a:p>
         </p:txBody>
       </p:sp>
@@ -3125,6 +3079,10 @@
             <a:prstDash val="solid"/>
           </a:ln>
         </p:spPr>
+        <p:txBody>
+          <a:bodyPr/>
+          <a:p/>
+        </p:txBody>
       </p:sp>
       <p:sp>
         <p:nvSpPr>
@@ -3206,79 +3164,44 @@
       </p:sp>
       <p:sp>
         <p:nvSpPr>
-          <p:cNvPr id="7" name="Text 5"/>
-          <p:cNvSpPr txBox="1"/>
-          <p:nvPr/>
-        </p:nvSpPr>
-        <p:spPr>
-          <a:xfrm>
-            <a:off x="640080" y="6446520"/>
-            <a:ext cx="8686800" cy="292608"/>
-          </a:xfrm>
-          <a:prstGeom prst="rect">
-            <a:avLst/>
-          </a:prstGeom>
-          <a:noFill/>
-          <a:ln/>
-        </p:spPr>
-        <p:txBody>
-          <a:bodyPr wrap="square" lIns="0" tIns="0" rIns="0" bIns="0" rtlCol="0" anchor="ctr"/>
-          <a:lstStyle/>
-          <a:p>
-            <a:pPr algn="l" indent="0" marL="0">
-              <a:buNone/>
-            </a:pPr>
-            <a:r>
-              <a:rPr lang="en-US" sz="900" dirty="0">
-                <a:solidFill>
-                  <a:srgbClr val="5D5D72"/>
-                </a:solidFill>
-                <a:latin typeface="Calibri" pitchFamily="34" charset="0"/>
-                <a:ea typeface="Calibri" pitchFamily="34" charset="-122"/>
-                <a:cs typeface="Calibri" pitchFamily="34" charset="-120"/>
-              </a:rPr>
-              <a:t>Usman Akram  •  COMSATS University Islamabad</a:t>
-            </a:r>
-            <a:endParaRPr lang="en-US" sz="900" dirty="0"/>
-          </a:p>
-        </p:txBody>
-      </p:sp>
-      <p:sp>
-        <p:nvSpPr>
-          <p:cNvPr id="8" name="Text 6"/>
-          <p:cNvSpPr txBox="1"/>
-          <p:nvPr/>
-        </p:nvSpPr>
-        <p:spPr>
-          <a:xfrm>
-            <a:off x="11155680" y="6446520"/>
-            <a:ext cx="457200" cy="292608"/>
-          </a:xfrm>
-          <a:prstGeom prst="rect">
-            <a:avLst/>
-          </a:prstGeom>
-          <a:noFill/>
-          <a:ln/>
-        </p:spPr>
-        <p:txBody>
-          <a:bodyPr wrap="square" lIns="0" tIns="0" rIns="0" bIns="0" rtlCol="0" anchor="ctr"/>
-          <a:lstStyle/>
-          <a:p>
-            <a:pPr algn="r" indent="0" marL="0">
-              <a:buNone/>
-            </a:pPr>
-            <a:r>
-              <a:rPr lang="en-US" sz="900" dirty="0">
-                <a:solidFill>
-                  <a:srgbClr val="5D5D72"/>
-                </a:solidFill>
-                <a:latin typeface="Calibri" pitchFamily="34" charset="0"/>
-                <a:ea typeface="Calibri" pitchFamily="34" charset="-122"/>
-                <a:cs typeface="Calibri" pitchFamily="34" charset="-120"/>
-              </a:rPr>
-              <a:t>11</a:t>
-            </a:r>
-            <a:endParaRPr lang="en-US" sz="900" dirty="0"/>
+          <p:cNvPr id="9" name="cuinotes-footer-mark"/>
+          <p:cNvSpPr txBox="1"/>
+          <p:nvPr/>
+        </p:nvSpPr>
+        <p:spPr>
+          <a:xfrm>
+            <a:off x="9951720" y="6455664"/>
+            <a:ext cx="2011680" cy="292608"/>
+          </a:xfrm>
+          <a:prstGeom prst="rect">
+            <a:avLst/>
+          </a:prstGeom>
+          <a:noFill/>
+        </p:spPr>
+        <p:txBody>
+          <a:bodyPr wrap="none" lIns="0" rIns="0" tIns="0" bIns="0">
+            <a:spAutoFit/>
+          </a:bodyPr>
+          <a:lstStyle/>
+          <a:p>
+            <a:pPr algn="r"/>
+            <a:r>
+              <a:rPr sz="1000">
+                <a:solidFill>
+                  <a:srgbClr val="8A939B"/>
+                </a:solidFill>
+                <a:hlinkClick r:id="rId3"/>
+              </a:rPr>
+              <a:t>cuinotes.com</a:t>
+            </a:r>
+            <a:r>
+              <a:rPr sz="1000">
+                <a:solidFill>
+                  <a:srgbClr val="8A939B"/>
+                </a:solidFill>
+              </a:rPr>
+              <a:t>  ·  11</a:t>
+            </a:r>
           </a:p>
         </p:txBody>
       </p:sp>
@@ -3411,6 +3334,10 @@
           </a:solidFill>
           <a:ln/>
         </p:spPr>
+        <p:txBody>
+          <a:bodyPr/>
+          <a:p/>
+        </p:txBody>
       </p:sp>
       <p:sp>
         <p:nvSpPr>
@@ -3470,6 +3397,10 @@
           </a:solidFill>
           <a:ln/>
         </p:spPr>
+        <p:txBody>
+          <a:bodyPr/>
+          <a:p/>
+        </p:txBody>
       </p:sp>
       <p:sp>
         <p:nvSpPr>
@@ -3529,6 +3460,10 @@
           </a:solidFill>
           <a:ln/>
         </p:spPr>
+        <p:txBody>
+          <a:bodyPr/>
+          <a:p/>
+        </p:txBody>
       </p:sp>
       <p:sp>
         <p:nvSpPr>
@@ -3588,6 +3523,10 @@
           </a:solidFill>
           <a:ln/>
         </p:spPr>
+        <p:txBody>
+          <a:bodyPr/>
+          <a:p/>
+        </p:txBody>
       </p:sp>
       <p:sp>
         <p:nvSpPr>
@@ -3647,6 +3586,10 @@
           </a:solidFill>
           <a:ln/>
         </p:spPr>
+        <p:txBody>
+          <a:bodyPr/>
+          <a:p/>
+        </p:txBody>
       </p:sp>
       <p:sp>
         <p:nvSpPr>
@@ -3689,79 +3632,44 @@
       </p:sp>
       <p:sp>
         <p:nvSpPr>
-          <p:cNvPr id="14" name="Text 12"/>
-          <p:cNvSpPr txBox="1"/>
-          <p:nvPr/>
-        </p:nvSpPr>
-        <p:spPr>
-          <a:xfrm>
-            <a:off x="640080" y="6446520"/>
-            <a:ext cx="8686800" cy="292608"/>
-          </a:xfrm>
-          <a:prstGeom prst="rect">
-            <a:avLst/>
-          </a:prstGeom>
-          <a:noFill/>
-          <a:ln/>
-        </p:spPr>
-        <p:txBody>
-          <a:bodyPr wrap="square" lIns="0" tIns="0" rIns="0" bIns="0" rtlCol="0" anchor="ctr"/>
-          <a:lstStyle/>
-          <a:p>
-            <a:pPr algn="l" indent="0" marL="0">
-              <a:buNone/>
-            </a:pPr>
-            <a:r>
-              <a:rPr lang="en-US" sz="900" dirty="0">
-                <a:solidFill>
-                  <a:srgbClr val="5D5D72"/>
-                </a:solidFill>
-                <a:latin typeface="Calibri" pitchFamily="34" charset="0"/>
-                <a:ea typeface="Calibri" pitchFamily="34" charset="-122"/>
-                <a:cs typeface="Calibri" pitchFamily="34" charset="-120"/>
-              </a:rPr>
-              <a:t>Usman Akram  •  COMSATS University Islamabad</a:t>
-            </a:r>
-            <a:endParaRPr lang="en-US" sz="900" dirty="0"/>
-          </a:p>
-        </p:txBody>
-      </p:sp>
-      <p:sp>
-        <p:nvSpPr>
-          <p:cNvPr id="15" name="Text 13"/>
-          <p:cNvSpPr txBox="1"/>
-          <p:nvPr/>
-        </p:nvSpPr>
-        <p:spPr>
-          <a:xfrm>
-            <a:off x="11155680" y="6446520"/>
-            <a:ext cx="457200" cy="292608"/>
-          </a:xfrm>
-          <a:prstGeom prst="rect">
-            <a:avLst/>
-          </a:prstGeom>
-          <a:noFill/>
-          <a:ln/>
-        </p:spPr>
-        <p:txBody>
-          <a:bodyPr wrap="square" lIns="0" tIns="0" rIns="0" bIns="0" rtlCol="0" anchor="ctr"/>
-          <a:lstStyle/>
-          <a:p>
-            <a:pPr algn="r" indent="0" marL="0">
-              <a:buNone/>
-            </a:pPr>
-            <a:r>
-              <a:rPr lang="en-US" sz="900" dirty="0">
-                <a:solidFill>
-                  <a:srgbClr val="5D5D72"/>
-                </a:solidFill>
-                <a:latin typeface="Calibri" pitchFamily="34" charset="0"/>
-                <a:ea typeface="Calibri" pitchFamily="34" charset="-122"/>
-                <a:cs typeface="Calibri" pitchFamily="34" charset="-120"/>
-              </a:rPr>
-              <a:t>12</a:t>
-            </a:r>
-            <a:endParaRPr lang="en-US" sz="900" dirty="0"/>
+          <p:cNvPr id="16" name="cuinotes-footer-mark"/>
+          <p:cNvSpPr txBox="1"/>
+          <p:nvPr/>
+        </p:nvSpPr>
+        <p:spPr>
+          <a:xfrm>
+            <a:off x="9951720" y="6455664"/>
+            <a:ext cx="2011680" cy="292608"/>
+          </a:xfrm>
+          <a:prstGeom prst="rect">
+            <a:avLst/>
+          </a:prstGeom>
+          <a:noFill/>
+        </p:spPr>
+        <p:txBody>
+          <a:bodyPr wrap="none" lIns="0" rIns="0" tIns="0" bIns="0">
+            <a:spAutoFit/>
+          </a:bodyPr>
+          <a:lstStyle/>
+          <a:p>
+            <a:pPr algn="r"/>
+            <a:r>
+              <a:rPr sz="1000">
+                <a:solidFill>
+                  <a:srgbClr val="8A939B"/>
+                </a:solidFill>
+                <a:hlinkClick r:id="rId3"/>
+              </a:rPr>
+              <a:t>cuinotes.com</a:t>
+            </a:r>
+            <a:r>
+              <a:rPr sz="1000">
+                <a:solidFill>
+                  <a:srgbClr val="8A939B"/>
+                </a:solidFill>
+              </a:rPr>
+              <a:t>  ·  12</a:t>
+            </a:r>
           </a:p>
         </p:txBody>
       </p:sp>
@@ -3894,6 +3802,10 @@
           </a:solidFill>
           <a:ln/>
         </p:spPr>
+        <p:txBody>
+          <a:bodyPr/>
+          <a:p/>
+        </p:txBody>
       </p:sp>
       <p:sp>
         <p:nvSpPr>
@@ -3992,6 +3904,10 @@
           </a:solidFill>
           <a:ln/>
         </p:spPr>
+        <p:txBody>
+          <a:bodyPr/>
+          <a:p/>
+        </p:txBody>
       </p:sp>
       <p:sp>
         <p:nvSpPr>
@@ -4090,6 +4006,10 @@
           </a:solidFill>
           <a:ln/>
         </p:spPr>
+        <p:txBody>
+          <a:bodyPr/>
+          <a:p/>
+        </p:txBody>
       </p:sp>
       <p:sp>
         <p:nvSpPr>
@@ -4188,6 +4108,10 @@
           </a:solidFill>
           <a:ln/>
         </p:spPr>
+        <p:txBody>
+          <a:bodyPr/>
+          <a:p/>
+        </p:txBody>
       </p:sp>
       <p:sp>
         <p:nvSpPr>
@@ -4286,6 +4210,10 @@
           </a:solidFill>
           <a:ln/>
         </p:spPr>
+        <p:txBody>
+          <a:bodyPr/>
+          <a:p/>
+        </p:txBody>
       </p:sp>
       <p:sp>
         <p:nvSpPr>
@@ -4384,6 +4312,10 @@
           </a:solidFill>
           <a:ln/>
         </p:spPr>
+        <p:txBody>
+          <a:bodyPr/>
+          <a:p/>
+        </p:txBody>
       </p:sp>
       <p:sp>
         <p:nvSpPr>
@@ -4465,79 +4397,44 @@
       </p:sp>
       <p:sp>
         <p:nvSpPr>
-          <p:cNvPr id="22" name="Text 20"/>
-          <p:cNvSpPr txBox="1"/>
-          <p:nvPr/>
-        </p:nvSpPr>
-        <p:spPr>
-          <a:xfrm>
-            <a:off x="640080" y="6446520"/>
-            <a:ext cx="8686800" cy="292608"/>
-          </a:xfrm>
-          <a:prstGeom prst="rect">
-            <a:avLst/>
-          </a:prstGeom>
-          <a:noFill/>
-          <a:ln/>
-        </p:spPr>
-        <p:txBody>
-          <a:bodyPr wrap="square" lIns="0" tIns="0" rIns="0" bIns="0" rtlCol="0" anchor="ctr"/>
-          <a:lstStyle/>
-          <a:p>
-            <a:pPr algn="l" indent="0" marL="0">
-              <a:buNone/>
-            </a:pPr>
-            <a:r>
-              <a:rPr lang="en-US" sz="900" dirty="0">
-                <a:solidFill>
-                  <a:srgbClr val="5D5D72"/>
-                </a:solidFill>
-                <a:latin typeface="Calibri" pitchFamily="34" charset="0"/>
-                <a:ea typeface="Calibri" pitchFamily="34" charset="-122"/>
-                <a:cs typeface="Calibri" pitchFamily="34" charset="-120"/>
-              </a:rPr>
-              <a:t>Usman Akram  •  COMSATS University Islamabad</a:t>
-            </a:r>
-            <a:endParaRPr lang="en-US" sz="900" dirty="0"/>
-          </a:p>
-        </p:txBody>
-      </p:sp>
-      <p:sp>
-        <p:nvSpPr>
-          <p:cNvPr id="23" name="Text 21"/>
-          <p:cNvSpPr txBox="1"/>
-          <p:nvPr/>
-        </p:nvSpPr>
-        <p:spPr>
-          <a:xfrm>
-            <a:off x="11155680" y="6446520"/>
-            <a:ext cx="457200" cy="292608"/>
-          </a:xfrm>
-          <a:prstGeom prst="rect">
-            <a:avLst/>
-          </a:prstGeom>
-          <a:noFill/>
-          <a:ln/>
-        </p:spPr>
-        <p:txBody>
-          <a:bodyPr wrap="square" lIns="0" tIns="0" rIns="0" bIns="0" rtlCol="0" anchor="ctr"/>
-          <a:lstStyle/>
-          <a:p>
-            <a:pPr algn="r" indent="0" marL="0">
-              <a:buNone/>
-            </a:pPr>
-            <a:r>
-              <a:rPr lang="en-US" sz="900" dirty="0">
-                <a:solidFill>
-                  <a:srgbClr val="5D5D72"/>
-                </a:solidFill>
-                <a:latin typeface="Calibri" pitchFamily="34" charset="0"/>
-                <a:ea typeface="Calibri" pitchFamily="34" charset="-122"/>
-                <a:cs typeface="Calibri" pitchFamily="34" charset="-120"/>
-              </a:rPr>
-              <a:t>13</a:t>
-            </a:r>
-            <a:endParaRPr lang="en-US" sz="900" dirty="0"/>
+          <p:cNvPr id="24" name="cuinotes-footer-mark"/>
+          <p:cNvSpPr txBox="1"/>
+          <p:nvPr/>
+        </p:nvSpPr>
+        <p:spPr>
+          <a:xfrm>
+            <a:off x="9951720" y="6455664"/>
+            <a:ext cx="2011680" cy="292608"/>
+          </a:xfrm>
+          <a:prstGeom prst="rect">
+            <a:avLst/>
+          </a:prstGeom>
+          <a:noFill/>
+        </p:spPr>
+        <p:txBody>
+          <a:bodyPr wrap="none" lIns="0" rIns="0" tIns="0" bIns="0">
+            <a:spAutoFit/>
+          </a:bodyPr>
+          <a:lstStyle/>
+          <a:p>
+            <a:pPr algn="r"/>
+            <a:r>
+              <a:rPr sz="1000">
+                <a:solidFill>
+                  <a:srgbClr val="8A939B"/>
+                </a:solidFill>
+                <a:hlinkClick r:id="rId3"/>
+              </a:rPr>
+              <a:t>cuinotes.com</a:t>
+            </a:r>
+            <a:r>
+              <a:rPr sz="1000">
+                <a:solidFill>
+                  <a:srgbClr val="8A939B"/>
+                </a:solidFill>
+              </a:rPr>
+              <a:t>  ·  13</a:t>
+            </a:r>
           </a:p>
         </p:txBody>
       </p:sp>
@@ -4670,6 +4567,10 @@
           </a:solidFill>
           <a:ln/>
         </p:spPr>
+        <p:txBody>
+          <a:bodyPr/>
+          <a:p/>
+        </p:txBody>
       </p:sp>
       <p:sp>
         <p:nvSpPr>
@@ -4768,6 +4669,10 @@
           </a:solidFill>
           <a:ln/>
         </p:spPr>
+        <p:txBody>
+          <a:bodyPr/>
+          <a:p/>
+        </p:txBody>
       </p:sp>
       <p:sp>
         <p:nvSpPr>
@@ -4866,6 +4771,10 @@
           </a:solidFill>
           <a:ln/>
         </p:spPr>
+        <p:txBody>
+          <a:bodyPr/>
+          <a:p/>
+        </p:txBody>
       </p:sp>
       <p:sp>
         <p:nvSpPr>
@@ -4964,6 +4873,10 @@
           </a:solidFill>
           <a:ln/>
         </p:spPr>
+        <p:txBody>
+          <a:bodyPr/>
+          <a:p/>
+        </p:txBody>
       </p:sp>
       <p:sp>
         <p:nvSpPr>
@@ -5062,6 +4975,10 @@
           </a:solidFill>
           <a:ln/>
         </p:spPr>
+        <p:txBody>
+          <a:bodyPr/>
+          <a:p/>
+        </p:txBody>
       </p:sp>
       <p:sp>
         <p:nvSpPr>
@@ -5160,6 +5077,10 @@
           </a:solidFill>
           <a:ln/>
         </p:spPr>
+        <p:txBody>
+          <a:bodyPr/>
+          <a:p/>
+        </p:txBody>
       </p:sp>
       <p:sp>
         <p:nvSpPr>
@@ -5241,79 +5162,44 @@
       </p:sp>
       <p:sp>
         <p:nvSpPr>
-          <p:cNvPr id="22" name="Text 20"/>
-          <p:cNvSpPr txBox="1"/>
-          <p:nvPr/>
-        </p:nvSpPr>
-        <p:spPr>
-          <a:xfrm>
-            <a:off x="640080" y="6446520"/>
-            <a:ext cx="8686800" cy="292608"/>
-          </a:xfrm>
-          <a:prstGeom prst="rect">
-            <a:avLst/>
-          </a:prstGeom>
-          <a:noFill/>
-          <a:ln/>
-        </p:spPr>
-        <p:txBody>
-          <a:bodyPr wrap="square" lIns="0" tIns="0" rIns="0" bIns="0" rtlCol="0" anchor="ctr"/>
-          <a:lstStyle/>
-          <a:p>
-            <a:pPr algn="l" indent="0" marL="0">
-              <a:buNone/>
-            </a:pPr>
-            <a:r>
-              <a:rPr lang="en-US" sz="900" dirty="0">
-                <a:solidFill>
-                  <a:srgbClr val="5D5D72"/>
-                </a:solidFill>
-                <a:latin typeface="Calibri" pitchFamily="34" charset="0"/>
-                <a:ea typeface="Calibri" pitchFamily="34" charset="-122"/>
-                <a:cs typeface="Calibri" pitchFamily="34" charset="-120"/>
-              </a:rPr>
-              <a:t>Usman Akram  •  COMSATS University Islamabad</a:t>
-            </a:r>
-            <a:endParaRPr lang="en-US" sz="900" dirty="0"/>
-          </a:p>
-        </p:txBody>
-      </p:sp>
-      <p:sp>
-        <p:nvSpPr>
-          <p:cNvPr id="23" name="Text 21"/>
-          <p:cNvSpPr txBox="1"/>
-          <p:nvPr/>
-        </p:nvSpPr>
-        <p:spPr>
-          <a:xfrm>
-            <a:off x="11155680" y="6446520"/>
-            <a:ext cx="457200" cy="292608"/>
-          </a:xfrm>
-          <a:prstGeom prst="rect">
-            <a:avLst/>
-          </a:prstGeom>
-          <a:noFill/>
-          <a:ln/>
-        </p:spPr>
-        <p:txBody>
-          <a:bodyPr wrap="square" lIns="0" tIns="0" rIns="0" bIns="0" rtlCol="0" anchor="ctr"/>
-          <a:lstStyle/>
-          <a:p>
-            <a:pPr algn="r" indent="0" marL="0">
-              <a:buNone/>
-            </a:pPr>
-            <a:r>
-              <a:rPr lang="en-US" sz="900" dirty="0">
-                <a:solidFill>
-                  <a:srgbClr val="5D5D72"/>
-                </a:solidFill>
-                <a:latin typeface="Calibri" pitchFamily="34" charset="0"/>
-                <a:ea typeface="Calibri" pitchFamily="34" charset="-122"/>
-                <a:cs typeface="Calibri" pitchFamily="34" charset="-120"/>
-              </a:rPr>
-              <a:t>14</a:t>
-            </a:r>
-            <a:endParaRPr lang="en-US" sz="900" dirty="0"/>
+          <p:cNvPr id="24" name="cuinotes-footer-mark"/>
+          <p:cNvSpPr txBox="1"/>
+          <p:nvPr/>
+        </p:nvSpPr>
+        <p:spPr>
+          <a:xfrm>
+            <a:off x="9951720" y="6455664"/>
+            <a:ext cx="2011680" cy="292608"/>
+          </a:xfrm>
+          <a:prstGeom prst="rect">
+            <a:avLst/>
+          </a:prstGeom>
+          <a:noFill/>
+        </p:spPr>
+        <p:txBody>
+          <a:bodyPr wrap="none" lIns="0" rIns="0" tIns="0" bIns="0">
+            <a:spAutoFit/>
+          </a:bodyPr>
+          <a:lstStyle/>
+          <a:p>
+            <a:pPr algn="r"/>
+            <a:r>
+              <a:rPr sz="1000">
+                <a:solidFill>
+                  <a:srgbClr val="8A939B"/>
+                </a:solidFill>
+                <a:hlinkClick r:id="rId3"/>
+              </a:rPr>
+              <a:t>cuinotes.com</a:t>
+            </a:r>
+            <a:r>
+              <a:rPr sz="1000">
+                <a:solidFill>
+                  <a:srgbClr val="8A939B"/>
+                </a:solidFill>
+              </a:rPr>
+              <a:t>  ·  14</a:t>
+            </a:r>
           </a:p>
         </p:txBody>
       </p:sp>
@@ -5446,6 +5332,10 @@
           </a:solidFill>
           <a:ln/>
         </p:spPr>
+        <p:txBody>
+          <a:bodyPr/>
+          <a:p/>
+        </p:txBody>
       </p:sp>
       <p:sp>
         <p:nvSpPr>
@@ -5505,6 +5395,10 @@
           </a:solidFill>
           <a:ln/>
         </p:spPr>
+        <p:txBody>
+          <a:bodyPr/>
+          <a:p/>
+        </p:txBody>
       </p:sp>
       <p:sp>
         <p:nvSpPr>
@@ -5564,6 +5458,10 @@
           </a:solidFill>
           <a:ln/>
         </p:spPr>
+        <p:txBody>
+          <a:bodyPr/>
+          <a:p/>
+        </p:txBody>
       </p:sp>
       <p:sp>
         <p:nvSpPr>
@@ -5623,6 +5521,10 @@
           </a:solidFill>
           <a:ln/>
         </p:spPr>
+        <p:txBody>
+          <a:bodyPr/>
+          <a:p/>
+        </p:txBody>
       </p:sp>
       <p:sp>
         <p:nvSpPr>
@@ -5682,6 +5584,10 @@
           </a:solidFill>
           <a:ln/>
         </p:spPr>
+        <p:txBody>
+          <a:bodyPr/>
+          <a:p/>
+        </p:txBody>
       </p:sp>
       <p:sp>
         <p:nvSpPr>
@@ -5724,79 +5630,44 @@
       </p:sp>
       <p:sp>
         <p:nvSpPr>
-          <p:cNvPr id="14" name="Text 12"/>
-          <p:cNvSpPr txBox="1"/>
-          <p:nvPr/>
-        </p:nvSpPr>
-        <p:spPr>
-          <a:xfrm>
-            <a:off x="640080" y="6446520"/>
-            <a:ext cx="8686800" cy="292608"/>
-          </a:xfrm>
-          <a:prstGeom prst="rect">
-            <a:avLst/>
-          </a:prstGeom>
-          <a:noFill/>
-          <a:ln/>
-        </p:spPr>
-        <p:txBody>
-          <a:bodyPr wrap="square" lIns="0" tIns="0" rIns="0" bIns="0" rtlCol="0" anchor="ctr"/>
-          <a:lstStyle/>
-          <a:p>
-            <a:pPr algn="l" indent="0" marL="0">
-              <a:buNone/>
-            </a:pPr>
-            <a:r>
-              <a:rPr lang="en-US" sz="900" dirty="0">
-                <a:solidFill>
-                  <a:srgbClr val="5D5D72"/>
-                </a:solidFill>
-                <a:latin typeface="Calibri" pitchFamily="34" charset="0"/>
-                <a:ea typeface="Calibri" pitchFamily="34" charset="-122"/>
-                <a:cs typeface="Calibri" pitchFamily="34" charset="-120"/>
-              </a:rPr>
-              <a:t>Usman Akram  •  COMSATS University Islamabad</a:t>
-            </a:r>
-            <a:endParaRPr lang="en-US" sz="900" dirty="0"/>
-          </a:p>
-        </p:txBody>
-      </p:sp>
-      <p:sp>
-        <p:nvSpPr>
-          <p:cNvPr id="15" name="Text 13"/>
-          <p:cNvSpPr txBox="1"/>
-          <p:nvPr/>
-        </p:nvSpPr>
-        <p:spPr>
-          <a:xfrm>
-            <a:off x="11155680" y="6446520"/>
-            <a:ext cx="457200" cy="292608"/>
-          </a:xfrm>
-          <a:prstGeom prst="rect">
-            <a:avLst/>
-          </a:prstGeom>
-          <a:noFill/>
-          <a:ln/>
-        </p:spPr>
-        <p:txBody>
-          <a:bodyPr wrap="square" lIns="0" tIns="0" rIns="0" bIns="0" rtlCol="0" anchor="ctr"/>
-          <a:lstStyle/>
-          <a:p>
-            <a:pPr algn="r" indent="0" marL="0">
-              <a:buNone/>
-            </a:pPr>
-            <a:r>
-              <a:rPr lang="en-US" sz="900" dirty="0">
-                <a:solidFill>
-                  <a:srgbClr val="5D5D72"/>
-                </a:solidFill>
-                <a:latin typeface="Calibri" pitchFamily="34" charset="0"/>
-                <a:ea typeface="Calibri" pitchFamily="34" charset="-122"/>
-                <a:cs typeface="Calibri" pitchFamily="34" charset="-120"/>
-              </a:rPr>
-              <a:t>15</a:t>
-            </a:r>
-            <a:endParaRPr lang="en-US" sz="900" dirty="0"/>
+          <p:cNvPr id="16" name="cuinotes-footer-mark"/>
+          <p:cNvSpPr txBox="1"/>
+          <p:nvPr/>
+        </p:nvSpPr>
+        <p:spPr>
+          <a:xfrm>
+            <a:off x="9951720" y="6455664"/>
+            <a:ext cx="2011680" cy="292608"/>
+          </a:xfrm>
+          <a:prstGeom prst="rect">
+            <a:avLst/>
+          </a:prstGeom>
+          <a:noFill/>
+        </p:spPr>
+        <p:txBody>
+          <a:bodyPr wrap="none" lIns="0" rIns="0" tIns="0" bIns="0">
+            <a:spAutoFit/>
+          </a:bodyPr>
+          <a:lstStyle/>
+          <a:p>
+            <a:pPr algn="r"/>
+            <a:r>
+              <a:rPr sz="1000">
+                <a:solidFill>
+                  <a:srgbClr val="8A939B"/>
+                </a:solidFill>
+                <a:hlinkClick r:id="rId3"/>
+              </a:rPr>
+              <a:t>cuinotes.com</a:t>
+            </a:r>
+            <a:r>
+              <a:rPr sz="1000">
+                <a:solidFill>
+                  <a:srgbClr val="8A939B"/>
+                </a:solidFill>
+              </a:rPr>
+              <a:t>  ·  15</a:t>
+            </a:r>
           </a:p>
         </p:txBody>
       </p:sp>
@@ -5929,6 +5800,10 @@
           </a:solidFill>
           <a:ln/>
         </p:spPr>
+        <p:txBody>
+          <a:bodyPr/>
+          <a:p/>
+        </p:txBody>
       </p:sp>
       <p:sp>
         <p:nvSpPr>
@@ -6027,6 +5902,10 @@
           </a:solidFill>
           <a:ln/>
         </p:spPr>
+        <p:txBody>
+          <a:bodyPr/>
+          <a:p/>
+        </p:txBody>
       </p:sp>
       <p:sp>
         <p:nvSpPr>
@@ -6125,6 +6004,10 @@
           </a:solidFill>
           <a:ln/>
         </p:spPr>
+        <p:txBody>
+          <a:bodyPr/>
+          <a:p/>
+        </p:txBody>
       </p:sp>
       <p:sp>
         <p:nvSpPr>
@@ -6223,6 +6106,10 @@
           </a:solidFill>
           <a:ln/>
         </p:spPr>
+        <p:txBody>
+          <a:bodyPr/>
+          <a:p/>
+        </p:txBody>
       </p:sp>
       <p:sp>
         <p:nvSpPr>
@@ -6321,6 +6208,10 @@
           </a:solidFill>
           <a:ln/>
         </p:spPr>
+        <p:txBody>
+          <a:bodyPr/>
+          <a:p/>
+        </p:txBody>
       </p:sp>
       <p:sp>
         <p:nvSpPr>
@@ -6419,6 +6310,10 @@
           </a:solidFill>
           <a:ln/>
         </p:spPr>
+        <p:txBody>
+          <a:bodyPr/>
+          <a:p/>
+        </p:txBody>
       </p:sp>
       <p:sp>
         <p:nvSpPr>
@@ -6500,79 +6395,44 @@
       </p:sp>
       <p:sp>
         <p:nvSpPr>
-          <p:cNvPr id="22" name="Text 20"/>
-          <p:cNvSpPr txBox="1"/>
-          <p:nvPr/>
-        </p:nvSpPr>
-        <p:spPr>
-          <a:xfrm>
-            <a:off x="640080" y="6446520"/>
-            <a:ext cx="8686800" cy="292608"/>
-          </a:xfrm>
-          <a:prstGeom prst="rect">
-            <a:avLst/>
-          </a:prstGeom>
-          <a:noFill/>
-          <a:ln/>
-        </p:spPr>
-        <p:txBody>
-          <a:bodyPr wrap="square" lIns="0" tIns="0" rIns="0" bIns="0" rtlCol="0" anchor="ctr"/>
-          <a:lstStyle/>
-          <a:p>
-            <a:pPr algn="l" indent="0" marL="0">
-              <a:buNone/>
-            </a:pPr>
-            <a:r>
-              <a:rPr lang="en-US" sz="900" dirty="0">
-                <a:solidFill>
-                  <a:srgbClr val="9AA3D8"/>
-                </a:solidFill>
-                <a:latin typeface="Calibri" pitchFamily="34" charset="0"/>
-                <a:ea typeface="Calibri" pitchFamily="34" charset="-122"/>
-                <a:cs typeface="Calibri" pitchFamily="34" charset="-120"/>
-              </a:rPr>
-              <a:t>Usman Akram  •  COMSATS University Islamabad</a:t>
-            </a:r>
-            <a:endParaRPr lang="en-US" sz="900" dirty="0"/>
-          </a:p>
-        </p:txBody>
-      </p:sp>
-      <p:sp>
-        <p:nvSpPr>
-          <p:cNvPr id="23" name="Text 21"/>
-          <p:cNvSpPr txBox="1"/>
-          <p:nvPr/>
-        </p:nvSpPr>
-        <p:spPr>
-          <a:xfrm>
-            <a:off x="11155680" y="6446520"/>
-            <a:ext cx="457200" cy="292608"/>
-          </a:xfrm>
-          <a:prstGeom prst="rect">
-            <a:avLst/>
-          </a:prstGeom>
-          <a:noFill/>
-          <a:ln/>
-        </p:spPr>
-        <p:txBody>
-          <a:bodyPr wrap="square" lIns="0" tIns="0" rIns="0" bIns="0" rtlCol="0" anchor="ctr"/>
-          <a:lstStyle/>
-          <a:p>
-            <a:pPr algn="r" indent="0" marL="0">
-              <a:buNone/>
-            </a:pPr>
-            <a:r>
-              <a:rPr lang="en-US" sz="900" dirty="0">
-                <a:solidFill>
-                  <a:srgbClr val="9AA3D8"/>
-                </a:solidFill>
-                <a:latin typeface="Calibri" pitchFamily="34" charset="0"/>
-                <a:ea typeface="Calibri" pitchFamily="34" charset="-122"/>
-                <a:cs typeface="Calibri" pitchFamily="34" charset="-120"/>
-              </a:rPr>
-              <a:t>16</a:t>
-            </a:r>
-            <a:endParaRPr lang="en-US" sz="900" dirty="0"/>
+          <p:cNvPr id="24" name="cuinotes-footer-mark"/>
+          <p:cNvSpPr txBox="1"/>
+          <p:nvPr/>
+        </p:nvSpPr>
+        <p:spPr>
+          <a:xfrm>
+            <a:off x="9951720" y="6455664"/>
+            <a:ext cx="2011680" cy="292608"/>
+          </a:xfrm>
+          <a:prstGeom prst="rect">
+            <a:avLst/>
+          </a:prstGeom>
+          <a:noFill/>
+        </p:spPr>
+        <p:txBody>
+          <a:bodyPr wrap="none" lIns="0" rIns="0" tIns="0" bIns="0">
+            <a:spAutoFit/>
+          </a:bodyPr>
+          <a:lstStyle/>
+          <a:p>
+            <a:pPr algn="r"/>
+            <a:r>
+              <a:rPr sz="1000">
+                <a:solidFill>
+                  <a:srgbClr val="8A939B"/>
+                </a:solidFill>
+                <a:hlinkClick r:id="rId3"/>
+              </a:rPr>
+              <a:t>cuinotes.com</a:t>
+            </a:r>
+            <a:r>
+              <a:rPr sz="1000">
+                <a:solidFill>
+                  <a:srgbClr val="8A939B"/>
+                </a:solidFill>
+              </a:rPr>
+              <a:t>  ·  16</a:t>
+            </a:r>
           </a:p>
         </p:txBody>
       </p:sp>
@@ -6705,6 +6565,10 @@
           </a:solidFill>
           <a:ln/>
         </p:spPr>
+        <p:txBody>
+          <a:bodyPr/>
+          <a:p/>
+        </p:txBody>
       </p:sp>
       <p:sp>
         <p:nvSpPr>
@@ -6803,6 +6667,10 @@
           </a:solidFill>
           <a:ln/>
         </p:spPr>
+        <p:txBody>
+          <a:bodyPr/>
+          <a:p/>
+        </p:txBody>
       </p:sp>
       <p:sp>
         <p:nvSpPr>
@@ -6901,6 +6769,10 @@
           </a:solidFill>
           <a:ln/>
         </p:spPr>
+        <p:txBody>
+          <a:bodyPr/>
+          <a:p/>
+        </p:txBody>
       </p:sp>
       <p:sp>
         <p:nvSpPr>
@@ -6999,6 +6871,10 @@
           </a:solidFill>
           <a:ln/>
         </p:spPr>
+        <p:txBody>
+          <a:bodyPr/>
+          <a:p/>
+        </p:txBody>
       </p:sp>
       <p:sp>
         <p:nvSpPr>
@@ -7097,6 +6973,10 @@
           </a:solidFill>
           <a:ln/>
         </p:spPr>
+        <p:txBody>
+          <a:bodyPr/>
+          <a:p/>
+        </p:txBody>
       </p:sp>
       <p:sp>
         <p:nvSpPr>
@@ -7195,6 +7075,10 @@
           </a:solidFill>
           <a:ln/>
         </p:spPr>
+        <p:txBody>
+          <a:bodyPr/>
+          <a:p/>
+        </p:txBody>
       </p:sp>
       <p:sp>
         <p:nvSpPr>
@@ -7293,6 +7177,10 @@
           </a:solidFill>
           <a:ln/>
         </p:spPr>
+        <p:txBody>
+          <a:bodyPr/>
+          <a:p/>
+        </p:txBody>
       </p:sp>
       <p:sp>
         <p:nvSpPr>
@@ -7374,79 +7262,44 @@
       </p:sp>
       <p:sp>
         <p:nvSpPr>
-          <p:cNvPr id="25" name="Text 23"/>
-          <p:cNvSpPr txBox="1"/>
-          <p:nvPr/>
-        </p:nvSpPr>
-        <p:spPr>
-          <a:xfrm>
-            <a:off x="640080" y="6446520"/>
-            <a:ext cx="8686800" cy="292608"/>
-          </a:xfrm>
-          <a:prstGeom prst="rect">
-            <a:avLst/>
-          </a:prstGeom>
-          <a:noFill/>
-          <a:ln/>
-        </p:spPr>
-        <p:txBody>
-          <a:bodyPr wrap="square" lIns="0" tIns="0" rIns="0" bIns="0" rtlCol="0" anchor="ctr"/>
-          <a:lstStyle/>
-          <a:p>
-            <a:pPr algn="l" indent="0" marL="0">
-              <a:buNone/>
-            </a:pPr>
-            <a:r>
-              <a:rPr lang="en-US" sz="900" dirty="0">
-                <a:solidFill>
-                  <a:srgbClr val="5D5D72"/>
-                </a:solidFill>
-                <a:latin typeface="Calibri" pitchFamily="34" charset="0"/>
-                <a:ea typeface="Calibri" pitchFamily="34" charset="-122"/>
-                <a:cs typeface="Calibri" pitchFamily="34" charset="-120"/>
-              </a:rPr>
-              <a:t>Usman Akram  •  COMSATS University Islamabad</a:t>
-            </a:r>
-            <a:endParaRPr lang="en-US" sz="900" dirty="0"/>
-          </a:p>
-        </p:txBody>
-      </p:sp>
-      <p:sp>
-        <p:nvSpPr>
-          <p:cNvPr id="26" name="Text 24"/>
-          <p:cNvSpPr txBox="1"/>
-          <p:nvPr/>
-        </p:nvSpPr>
-        <p:spPr>
-          <a:xfrm>
-            <a:off x="11155680" y="6446520"/>
-            <a:ext cx="457200" cy="292608"/>
-          </a:xfrm>
-          <a:prstGeom prst="rect">
-            <a:avLst/>
-          </a:prstGeom>
-          <a:noFill/>
-          <a:ln/>
-        </p:spPr>
-        <p:txBody>
-          <a:bodyPr wrap="square" lIns="0" tIns="0" rIns="0" bIns="0" rtlCol="0" anchor="ctr"/>
-          <a:lstStyle/>
-          <a:p>
-            <a:pPr algn="r" indent="0" marL="0">
-              <a:buNone/>
-            </a:pPr>
-            <a:r>
-              <a:rPr lang="en-US" sz="900" dirty="0">
-                <a:solidFill>
-                  <a:srgbClr val="5D5D72"/>
-                </a:solidFill>
-                <a:latin typeface="Calibri" pitchFamily="34" charset="0"/>
-                <a:ea typeface="Calibri" pitchFamily="34" charset="-122"/>
-                <a:cs typeface="Calibri" pitchFamily="34" charset="-120"/>
-              </a:rPr>
-              <a:t>2</a:t>
-            </a:r>
-            <a:endParaRPr lang="en-US" sz="900" dirty="0"/>
+          <p:cNvPr id="27" name="cuinotes-footer-mark"/>
+          <p:cNvSpPr txBox="1"/>
+          <p:nvPr/>
+        </p:nvSpPr>
+        <p:spPr>
+          <a:xfrm>
+            <a:off x="9951720" y="6455664"/>
+            <a:ext cx="2011680" cy="292608"/>
+          </a:xfrm>
+          <a:prstGeom prst="rect">
+            <a:avLst/>
+          </a:prstGeom>
+          <a:noFill/>
+        </p:spPr>
+        <p:txBody>
+          <a:bodyPr wrap="none" lIns="0" rIns="0" tIns="0" bIns="0">
+            <a:spAutoFit/>
+          </a:bodyPr>
+          <a:lstStyle/>
+          <a:p>
+            <a:pPr algn="r"/>
+            <a:r>
+              <a:rPr sz="1000">
+                <a:solidFill>
+                  <a:srgbClr val="8A939B"/>
+                </a:solidFill>
+                <a:hlinkClick r:id="rId3"/>
+              </a:rPr>
+              <a:t>cuinotes.com</a:t>
+            </a:r>
+            <a:r>
+              <a:rPr sz="1000">
+                <a:solidFill>
+                  <a:srgbClr val="8A939B"/>
+                </a:solidFill>
+              </a:rPr>
+              <a:t>  ·  2</a:t>
+            </a:r>
           </a:p>
         </p:txBody>
       </p:sp>
@@ -7583,6 +7436,10 @@
             <a:tailEnd type="triangle"/>
           </a:ln>
         </p:spPr>
+        <p:txBody>
+          <a:bodyPr/>
+          <a:p/>
+        </p:txBody>
       </p:sp>
       <p:sp>
         <p:nvSpPr>
@@ -7607,6 +7464,10 @@
             <a:tailEnd type="triangle"/>
           </a:ln>
         </p:spPr>
+        <p:txBody>
+          <a:bodyPr/>
+          <a:p/>
+        </p:txBody>
       </p:sp>
       <p:sp>
         <p:nvSpPr>
@@ -7631,6 +7492,10 @@
             <a:tailEnd type="triangle"/>
           </a:ln>
         </p:spPr>
+        <p:txBody>
+          <a:bodyPr/>
+          <a:p/>
+        </p:txBody>
       </p:sp>
       <p:sp>
         <p:nvSpPr>
@@ -7655,6 +7520,10 @@
             <a:tailEnd type="triangle"/>
           </a:ln>
         </p:spPr>
+        <p:txBody>
+          <a:bodyPr/>
+          <a:p/>
+        </p:txBody>
       </p:sp>
       <p:sp>
         <p:nvSpPr>
@@ -7679,6 +7548,10 @@
             <a:tailEnd type="triangle"/>
           </a:ln>
         </p:spPr>
+        <p:txBody>
+          <a:bodyPr/>
+          <a:p/>
+        </p:txBody>
       </p:sp>
       <p:sp>
         <p:nvSpPr>
@@ -7757,6 +7630,10 @@
           </a:solidFill>
           <a:ln/>
         </p:spPr>
+        <p:txBody>
+          <a:bodyPr/>
+          <a:p/>
+        </p:txBody>
       </p:sp>
       <p:sp>
         <p:nvSpPr>
@@ -7859,6 +7736,10 @@
           </a:solidFill>
           <a:ln/>
         </p:spPr>
+        <p:txBody>
+          <a:bodyPr/>
+          <a:p/>
+        </p:txBody>
       </p:sp>
       <p:sp>
         <p:nvSpPr>
@@ -7941,6 +7822,10 @@
           </a:solidFill>
           <a:ln/>
         </p:spPr>
+        <p:txBody>
+          <a:bodyPr/>
+          <a:p/>
+        </p:txBody>
       </p:sp>
       <p:sp>
         <p:nvSpPr>
@@ -8023,6 +7908,10 @@
           </a:solidFill>
           <a:ln/>
         </p:spPr>
+        <p:txBody>
+          <a:bodyPr/>
+          <a:p/>
+        </p:txBody>
       </p:sp>
       <p:sp>
         <p:nvSpPr>
@@ -8125,6 +8014,10 @@
           </a:solidFill>
           <a:ln/>
         </p:spPr>
+        <p:txBody>
+          <a:bodyPr/>
+          <a:p/>
+        </p:txBody>
       </p:sp>
       <p:sp>
         <p:nvSpPr>
@@ -8249,79 +8142,44 @@
       </p:sp>
       <p:sp>
         <p:nvSpPr>
-          <p:cNvPr id="21" name="Text 19"/>
-          <p:cNvSpPr txBox="1"/>
-          <p:nvPr/>
-        </p:nvSpPr>
-        <p:spPr>
-          <a:xfrm>
-            <a:off x="640080" y="6446520"/>
-            <a:ext cx="8686800" cy="292608"/>
-          </a:xfrm>
-          <a:prstGeom prst="rect">
-            <a:avLst/>
-          </a:prstGeom>
-          <a:noFill/>
-          <a:ln/>
-        </p:spPr>
-        <p:txBody>
-          <a:bodyPr wrap="square" lIns="0" tIns="0" rIns="0" bIns="0" rtlCol="0" anchor="ctr"/>
-          <a:lstStyle/>
-          <a:p>
-            <a:pPr algn="l" indent="0" marL="0">
-              <a:buNone/>
-            </a:pPr>
-            <a:r>
-              <a:rPr lang="en-US" sz="900" dirty="0">
-                <a:solidFill>
-                  <a:srgbClr val="5D5D72"/>
-                </a:solidFill>
-                <a:latin typeface="Calibri" pitchFamily="34" charset="0"/>
-                <a:ea typeface="Calibri" pitchFamily="34" charset="-122"/>
-                <a:cs typeface="Calibri" pitchFamily="34" charset="-120"/>
-              </a:rPr>
-              <a:t>Usman Akram  •  COMSATS University Islamabad</a:t>
-            </a:r>
-            <a:endParaRPr lang="en-US" sz="900" dirty="0"/>
-          </a:p>
-        </p:txBody>
-      </p:sp>
-      <p:sp>
-        <p:nvSpPr>
-          <p:cNvPr id="22" name="Text 20"/>
-          <p:cNvSpPr txBox="1"/>
-          <p:nvPr/>
-        </p:nvSpPr>
-        <p:spPr>
-          <a:xfrm>
-            <a:off x="11155680" y="6446520"/>
-            <a:ext cx="457200" cy="292608"/>
-          </a:xfrm>
-          <a:prstGeom prst="rect">
-            <a:avLst/>
-          </a:prstGeom>
-          <a:noFill/>
-          <a:ln/>
-        </p:spPr>
-        <p:txBody>
-          <a:bodyPr wrap="square" lIns="0" tIns="0" rIns="0" bIns="0" rtlCol="0" anchor="ctr"/>
-          <a:lstStyle/>
-          <a:p>
-            <a:pPr algn="r" indent="0" marL="0">
-              <a:buNone/>
-            </a:pPr>
-            <a:r>
-              <a:rPr lang="en-US" sz="900" dirty="0">
-                <a:solidFill>
-                  <a:srgbClr val="5D5D72"/>
-                </a:solidFill>
-                <a:latin typeface="Calibri" pitchFamily="34" charset="0"/>
-                <a:ea typeface="Calibri" pitchFamily="34" charset="-122"/>
-                <a:cs typeface="Calibri" pitchFamily="34" charset="-120"/>
-              </a:rPr>
-              <a:t>3</a:t>
-            </a:r>
-            <a:endParaRPr lang="en-US" sz="900" dirty="0"/>
+          <p:cNvPr id="23" name="cuinotes-footer-mark"/>
+          <p:cNvSpPr txBox="1"/>
+          <p:nvPr/>
+        </p:nvSpPr>
+        <p:spPr>
+          <a:xfrm>
+            <a:off x="9951720" y="6455664"/>
+            <a:ext cx="2011680" cy="292608"/>
+          </a:xfrm>
+          <a:prstGeom prst="rect">
+            <a:avLst/>
+          </a:prstGeom>
+          <a:noFill/>
+        </p:spPr>
+        <p:txBody>
+          <a:bodyPr wrap="none" lIns="0" rIns="0" tIns="0" bIns="0">
+            <a:spAutoFit/>
+          </a:bodyPr>
+          <a:lstStyle/>
+          <a:p>
+            <a:pPr algn="r"/>
+            <a:r>
+              <a:rPr sz="1000">
+                <a:solidFill>
+                  <a:srgbClr val="8A939B"/>
+                </a:solidFill>
+                <a:hlinkClick r:id="rId3"/>
+              </a:rPr>
+              <a:t>cuinotes.com</a:t>
+            </a:r>
+            <a:r>
+              <a:rPr sz="1000">
+                <a:solidFill>
+                  <a:srgbClr val="8A939B"/>
+                </a:solidFill>
+              </a:rPr>
+              <a:t>  ·  3</a:t>
+            </a:r>
           </a:p>
         </p:txBody>
       </p:sp>
@@ -8454,6 +8312,10 @@
           </a:solidFill>
           <a:ln/>
         </p:spPr>
+        <p:txBody>
+          <a:bodyPr/>
+          <a:p/>
+        </p:txBody>
       </p:sp>
       <p:sp>
         <p:nvSpPr>
@@ -8513,6 +8375,10 @@
           </a:solidFill>
           <a:ln/>
         </p:spPr>
+        <p:txBody>
+          <a:bodyPr/>
+          <a:p/>
+        </p:txBody>
       </p:sp>
       <p:sp>
         <p:nvSpPr>
@@ -8572,6 +8438,10 @@
           </a:solidFill>
           <a:ln/>
         </p:spPr>
+        <p:txBody>
+          <a:bodyPr/>
+          <a:p/>
+        </p:txBody>
       </p:sp>
       <p:sp>
         <p:nvSpPr>
@@ -8631,6 +8501,10 @@
           </a:solidFill>
           <a:ln/>
         </p:spPr>
+        <p:txBody>
+          <a:bodyPr/>
+          <a:p/>
+        </p:txBody>
       </p:sp>
       <p:sp>
         <p:nvSpPr>
@@ -8690,6 +8564,10 @@
           </a:solidFill>
           <a:ln/>
         </p:spPr>
+        <p:txBody>
+          <a:bodyPr/>
+          <a:p/>
+        </p:txBody>
       </p:sp>
       <p:sp>
         <p:nvSpPr>
@@ -8749,6 +8627,10 @@
           </a:solidFill>
           <a:ln/>
         </p:spPr>
+        <p:txBody>
+          <a:bodyPr/>
+          <a:p/>
+        </p:txBody>
       </p:sp>
       <p:sp>
         <p:nvSpPr>
@@ -8808,6 +8690,10 @@
           </a:solidFill>
           <a:ln/>
         </p:spPr>
+        <p:txBody>
+          <a:bodyPr/>
+          <a:p/>
+        </p:txBody>
       </p:sp>
       <p:sp>
         <p:nvSpPr>
@@ -8867,6 +8753,10 @@
           </a:solidFill>
           <a:ln/>
         </p:spPr>
+        <p:txBody>
+          <a:bodyPr/>
+          <a:p/>
+        </p:txBody>
       </p:sp>
       <p:sp>
         <p:nvSpPr>
@@ -8909,79 +8799,44 @@
       </p:sp>
       <p:sp>
         <p:nvSpPr>
-          <p:cNvPr id="20" name="Text 18"/>
-          <p:cNvSpPr txBox="1"/>
-          <p:nvPr/>
-        </p:nvSpPr>
-        <p:spPr>
-          <a:xfrm>
-            <a:off x="640080" y="6446520"/>
-            <a:ext cx="8686800" cy="292608"/>
-          </a:xfrm>
-          <a:prstGeom prst="rect">
-            <a:avLst/>
-          </a:prstGeom>
-          <a:noFill/>
-          <a:ln/>
-        </p:spPr>
-        <p:txBody>
-          <a:bodyPr wrap="square" lIns="0" tIns="0" rIns="0" bIns="0" rtlCol="0" anchor="ctr"/>
-          <a:lstStyle/>
-          <a:p>
-            <a:pPr algn="l" indent="0" marL="0">
-              <a:buNone/>
-            </a:pPr>
-            <a:r>
-              <a:rPr lang="en-US" sz="900" dirty="0">
-                <a:solidFill>
-                  <a:srgbClr val="5D5D72"/>
-                </a:solidFill>
-                <a:latin typeface="Calibri" pitchFamily="34" charset="0"/>
-                <a:ea typeface="Calibri" pitchFamily="34" charset="-122"/>
-                <a:cs typeface="Calibri" pitchFamily="34" charset="-120"/>
-              </a:rPr>
-              <a:t>Usman Akram  •  COMSATS University Islamabad</a:t>
-            </a:r>
-            <a:endParaRPr lang="en-US" sz="900" dirty="0"/>
-          </a:p>
-        </p:txBody>
-      </p:sp>
-      <p:sp>
-        <p:nvSpPr>
-          <p:cNvPr id="21" name="Text 19"/>
-          <p:cNvSpPr txBox="1"/>
-          <p:nvPr/>
-        </p:nvSpPr>
-        <p:spPr>
-          <a:xfrm>
-            <a:off x="11155680" y="6446520"/>
-            <a:ext cx="457200" cy="292608"/>
-          </a:xfrm>
-          <a:prstGeom prst="rect">
-            <a:avLst/>
-          </a:prstGeom>
-          <a:noFill/>
-          <a:ln/>
-        </p:spPr>
-        <p:txBody>
-          <a:bodyPr wrap="square" lIns="0" tIns="0" rIns="0" bIns="0" rtlCol="0" anchor="ctr"/>
-          <a:lstStyle/>
-          <a:p>
-            <a:pPr algn="r" indent="0" marL="0">
-              <a:buNone/>
-            </a:pPr>
-            <a:r>
-              <a:rPr lang="en-US" sz="900" dirty="0">
-                <a:solidFill>
-                  <a:srgbClr val="5D5D72"/>
-                </a:solidFill>
-                <a:latin typeface="Calibri" pitchFamily="34" charset="0"/>
-                <a:ea typeface="Calibri" pitchFamily="34" charset="-122"/>
-                <a:cs typeface="Calibri" pitchFamily="34" charset="-120"/>
-              </a:rPr>
-              <a:t>4</a:t>
-            </a:r>
-            <a:endParaRPr lang="en-US" sz="900" dirty="0"/>
+          <p:cNvPr id="22" name="cuinotes-footer-mark"/>
+          <p:cNvSpPr txBox="1"/>
+          <p:nvPr/>
+        </p:nvSpPr>
+        <p:spPr>
+          <a:xfrm>
+            <a:off x="9951720" y="6455664"/>
+            <a:ext cx="2011680" cy="292608"/>
+          </a:xfrm>
+          <a:prstGeom prst="rect">
+            <a:avLst/>
+          </a:prstGeom>
+          <a:noFill/>
+        </p:spPr>
+        <p:txBody>
+          <a:bodyPr wrap="none" lIns="0" rIns="0" tIns="0" bIns="0">
+            <a:spAutoFit/>
+          </a:bodyPr>
+          <a:lstStyle/>
+          <a:p>
+            <a:pPr algn="r"/>
+            <a:r>
+              <a:rPr sz="1000">
+                <a:solidFill>
+                  <a:srgbClr val="8A939B"/>
+                </a:solidFill>
+                <a:hlinkClick r:id="rId3"/>
+              </a:rPr>
+              <a:t>cuinotes.com</a:t>
+            </a:r>
+            <a:r>
+              <a:rPr sz="1000">
+                <a:solidFill>
+                  <a:srgbClr val="8A939B"/>
+                </a:solidFill>
+              </a:rPr>
+              <a:t>  ·  4</a:t>
+            </a:r>
           </a:p>
         </p:txBody>
       </p:sp>
@@ -9121,6 +8976,10 @@
             <a:prstDash val="solid"/>
           </a:ln>
         </p:spPr>
+        <p:txBody>
+          <a:bodyPr/>
+          <a:p/>
+        </p:txBody>
       </p:sp>
       <p:sp>
         <p:nvSpPr>
@@ -9202,79 +9061,44 @@
       </p:sp>
       <p:sp>
         <p:nvSpPr>
-          <p:cNvPr id="7" name="Text 5"/>
-          <p:cNvSpPr txBox="1"/>
-          <p:nvPr/>
-        </p:nvSpPr>
-        <p:spPr>
-          <a:xfrm>
-            <a:off x="640080" y="6446520"/>
-            <a:ext cx="8686800" cy="292608"/>
-          </a:xfrm>
-          <a:prstGeom prst="rect">
-            <a:avLst/>
-          </a:prstGeom>
-          <a:noFill/>
-          <a:ln/>
-        </p:spPr>
-        <p:txBody>
-          <a:bodyPr wrap="square" lIns="0" tIns="0" rIns="0" bIns="0" rtlCol="0" anchor="ctr"/>
-          <a:lstStyle/>
-          <a:p>
-            <a:pPr algn="l" indent="0" marL="0">
-              <a:buNone/>
-            </a:pPr>
-            <a:r>
-              <a:rPr lang="en-US" sz="900" dirty="0">
-                <a:solidFill>
-                  <a:srgbClr val="5D5D72"/>
-                </a:solidFill>
-                <a:latin typeface="Calibri" pitchFamily="34" charset="0"/>
-                <a:ea typeface="Calibri" pitchFamily="34" charset="-122"/>
-                <a:cs typeface="Calibri" pitchFamily="34" charset="-120"/>
-              </a:rPr>
-              <a:t>Usman Akram  •  COMSATS University Islamabad</a:t>
-            </a:r>
-            <a:endParaRPr lang="en-US" sz="900" dirty="0"/>
-          </a:p>
-        </p:txBody>
-      </p:sp>
-      <p:sp>
-        <p:nvSpPr>
-          <p:cNvPr id="8" name="Text 6"/>
-          <p:cNvSpPr txBox="1"/>
-          <p:nvPr/>
-        </p:nvSpPr>
-        <p:spPr>
-          <a:xfrm>
-            <a:off x="11155680" y="6446520"/>
-            <a:ext cx="457200" cy="292608"/>
-          </a:xfrm>
-          <a:prstGeom prst="rect">
-            <a:avLst/>
-          </a:prstGeom>
-          <a:noFill/>
-          <a:ln/>
-        </p:spPr>
-        <p:txBody>
-          <a:bodyPr wrap="square" lIns="0" tIns="0" rIns="0" bIns="0" rtlCol="0" anchor="ctr"/>
-          <a:lstStyle/>
-          <a:p>
-            <a:pPr algn="r" indent="0" marL="0">
-              <a:buNone/>
-            </a:pPr>
-            <a:r>
-              <a:rPr lang="en-US" sz="900" dirty="0">
-                <a:solidFill>
-                  <a:srgbClr val="5D5D72"/>
-                </a:solidFill>
-                <a:latin typeface="Calibri" pitchFamily="34" charset="0"/>
-                <a:ea typeface="Calibri" pitchFamily="34" charset="-122"/>
-                <a:cs typeface="Calibri" pitchFamily="34" charset="-120"/>
-              </a:rPr>
-              <a:t>5</a:t>
-            </a:r>
-            <a:endParaRPr lang="en-US" sz="900" dirty="0"/>
+          <p:cNvPr id="9" name="cuinotes-footer-mark"/>
+          <p:cNvSpPr txBox="1"/>
+          <p:nvPr/>
+        </p:nvSpPr>
+        <p:spPr>
+          <a:xfrm>
+            <a:off x="9951720" y="6455664"/>
+            <a:ext cx="2011680" cy="292608"/>
+          </a:xfrm>
+          <a:prstGeom prst="rect">
+            <a:avLst/>
+          </a:prstGeom>
+          <a:noFill/>
+        </p:spPr>
+        <p:txBody>
+          <a:bodyPr wrap="none" lIns="0" rIns="0" tIns="0" bIns="0">
+            <a:spAutoFit/>
+          </a:bodyPr>
+          <a:lstStyle/>
+          <a:p>
+            <a:pPr algn="r"/>
+            <a:r>
+              <a:rPr sz="1000">
+                <a:solidFill>
+                  <a:srgbClr val="8A939B"/>
+                </a:solidFill>
+                <a:hlinkClick r:id="rId3"/>
+              </a:rPr>
+              <a:t>cuinotes.com</a:t>
+            </a:r>
+            <a:r>
+              <a:rPr sz="1000">
+                <a:solidFill>
+                  <a:srgbClr val="8A939B"/>
+                </a:solidFill>
+              </a:rPr>
+              <a:t>  ·  5</a:t>
+            </a:r>
           </a:p>
         </p:txBody>
       </p:sp>
@@ -9407,6 +9231,10 @@
           </a:solidFill>
           <a:ln/>
         </p:spPr>
+        <p:txBody>
+          <a:bodyPr/>
+          <a:p/>
+        </p:txBody>
       </p:sp>
       <p:sp>
         <p:nvSpPr>
@@ -9466,6 +9294,10 @@
           </a:solidFill>
           <a:ln/>
         </p:spPr>
+        <p:txBody>
+          <a:bodyPr/>
+          <a:p/>
+        </p:txBody>
       </p:sp>
       <p:sp>
         <p:nvSpPr>
@@ -9525,6 +9357,10 @@
           </a:solidFill>
           <a:ln/>
         </p:spPr>
+        <p:txBody>
+          <a:bodyPr/>
+          <a:p/>
+        </p:txBody>
       </p:sp>
       <p:sp>
         <p:nvSpPr>
@@ -9584,6 +9420,10 @@
           </a:solidFill>
           <a:ln/>
         </p:spPr>
+        <p:txBody>
+          <a:bodyPr/>
+          <a:p/>
+        </p:txBody>
       </p:sp>
       <p:sp>
         <p:nvSpPr>
@@ -9643,6 +9483,10 @@
           </a:solidFill>
           <a:ln/>
         </p:spPr>
+        <p:txBody>
+          <a:bodyPr/>
+          <a:p/>
+        </p:txBody>
       </p:sp>
       <p:sp>
         <p:nvSpPr>
@@ -9685,79 +9529,44 @@
       </p:sp>
       <p:sp>
         <p:nvSpPr>
-          <p:cNvPr id="14" name="Text 12"/>
-          <p:cNvSpPr txBox="1"/>
-          <p:nvPr/>
-        </p:nvSpPr>
-        <p:spPr>
-          <a:xfrm>
-            <a:off x="640080" y="6446520"/>
-            <a:ext cx="8686800" cy="292608"/>
-          </a:xfrm>
-          <a:prstGeom prst="rect">
-            <a:avLst/>
-          </a:prstGeom>
-          <a:noFill/>
-          <a:ln/>
-        </p:spPr>
-        <p:txBody>
-          <a:bodyPr wrap="square" lIns="0" tIns="0" rIns="0" bIns="0" rtlCol="0" anchor="ctr"/>
-          <a:lstStyle/>
-          <a:p>
-            <a:pPr algn="l" indent="0" marL="0">
-              <a:buNone/>
-            </a:pPr>
-            <a:r>
-              <a:rPr lang="en-US" sz="900" dirty="0">
-                <a:solidFill>
-                  <a:srgbClr val="5D5D72"/>
-                </a:solidFill>
-                <a:latin typeface="Calibri" pitchFamily="34" charset="0"/>
-                <a:ea typeface="Calibri" pitchFamily="34" charset="-122"/>
-                <a:cs typeface="Calibri" pitchFamily="34" charset="-120"/>
-              </a:rPr>
-              <a:t>Usman Akram  •  COMSATS University Islamabad</a:t>
-            </a:r>
-            <a:endParaRPr lang="en-US" sz="900" dirty="0"/>
-          </a:p>
-        </p:txBody>
-      </p:sp>
-      <p:sp>
-        <p:nvSpPr>
-          <p:cNvPr id="15" name="Text 13"/>
-          <p:cNvSpPr txBox="1"/>
-          <p:nvPr/>
-        </p:nvSpPr>
-        <p:spPr>
-          <a:xfrm>
-            <a:off x="11155680" y="6446520"/>
-            <a:ext cx="457200" cy="292608"/>
-          </a:xfrm>
-          <a:prstGeom prst="rect">
-            <a:avLst/>
-          </a:prstGeom>
-          <a:noFill/>
-          <a:ln/>
-        </p:spPr>
-        <p:txBody>
-          <a:bodyPr wrap="square" lIns="0" tIns="0" rIns="0" bIns="0" rtlCol="0" anchor="ctr"/>
-          <a:lstStyle/>
-          <a:p>
-            <a:pPr algn="r" indent="0" marL="0">
-              <a:buNone/>
-            </a:pPr>
-            <a:r>
-              <a:rPr lang="en-US" sz="900" dirty="0">
-                <a:solidFill>
-                  <a:srgbClr val="5D5D72"/>
-                </a:solidFill>
-                <a:latin typeface="Calibri" pitchFamily="34" charset="0"/>
-                <a:ea typeface="Calibri" pitchFamily="34" charset="-122"/>
-                <a:cs typeface="Calibri" pitchFamily="34" charset="-120"/>
-              </a:rPr>
-              <a:t>6</a:t>
-            </a:r>
-            <a:endParaRPr lang="en-US" sz="900" dirty="0"/>
+          <p:cNvPr id="16" name="cuinotes-footer-mark"/>
+          <p:cNvSpPr txBox="1"/>
+          <p:nvPr/>
+        </p:nvSpPr>
+        <p:spPr>
+          <a:xfrm>
+            <a:off x="9951720" y="6455664"/>
+            <a:ext cx="2011680" cy="292608"/>
+          </a:xfrm>
+          <a:prstGeom prst="rect">
+            <a:avLst/>
+          </a:prstGeom>
+          <a:noFill/>
+        </p:spPr>
+        <p:txBody>
+          <a:bodyPr wrap="none" lIns="0" rIns="0" tIns="0" bIns="0">
+            <a:spAutoFit/>
+          </a:bodyPr>
+          <a:lstStyle/>
+          <a:p>
+            <a:pPr algn="r"/>
+            <a:r>
+              <a:rPr sz="1000">
+                <a:solidFill>
+                  <a:srgbClr val="8A939B"/>
+                </a:solidFill>
+                <a:hlinkClick r:id="rId3"/>
+              </a:rPr>
+              <a:t>cuinotes.com</a:t>
+            </a:r>
+            <a:r>
+              <a:rPr sz="1000">
+                <a:solidFill>
+                  <a:srgbClr val="8A939B"/>
+                </a:solidFill>
+              </a:rPr>
+              <a:t>  ·  6</a:t>
+            </a:r>
           </a:p>
         </p:txBody>
       </p:sp>
@@ -9897,6 +9706,10 @@
             <a:prstDash val="solid"/>
           </a:ln>
         </p:spPr>
+        <p:txBody>
+          <a:bodyPr/>
+          <a:p/>
+        </p:txBody>
       </p:sp>
       <p:sp>
         <p:nvSpPr>
@@ -9978,79 +9791,44 @@
       </p:sp>
       <p:sp>
         <p:nvSpPr>
-          <p:cNvPr id="7" name="Text 5"/>
-          <p:cNvSpPr txBox="1"/>
-          <p:nvPr/>
-        </p:nvSpPr>
-        <p:spPr>
-          <a:xfrm>
-            <a:off x="640080" y="6446520"/>
-            <a:ext cx="8686800" cy="292608"/>
-          </a:xfrm>
-          <a:prstGeom prst="rect">
-            <a:avLst/>
-          </a:prstGeom>
-          <a:noFill/>
-          <a:ln/>
-        </p:spPr>
-        <p:txBody>
-          <a:bodyPr wrap="square" lIns="0" tIns="0" rIns="0" bIns="0" rtlCol="0" anchor="ctr"/>
-          <a:lstStyle/>
-          <a:p>
-            <a:pPr algn="l" indent="0" marL="0">
-              <a:buNone/>
-            </a:pPr>
-            <a:r>
-              <a:rPr lang="en-US" sz="900" dirty="0">
-                <a:solidFill>
-                  <a:srgbClr val="5D5D72"/>
-                </a:solidFill>
-                <a:latin typeface="Calibri" pitchFamily="34" charset="0"/>
-                <a:ea typeface="Calibri" pitchFamily="34" charset="-122"/>
-                <a:cs typeface="Calibri" pitchFamily="34" charset="-120"/>
-              </a:rPr>
-              <a:t>Usman Akram  •  COMSATS University Islamabad</a:t>
-            </a:r>
-            <a:endParaRPr lang="en-US" sz="900" dirty="0"/>
-          </a:p>
-        </p:txBody>
-      </p:sp>
-      <p:sp>
-        <p:nvSpPr>
-          <p:cNvPr id="8" name="Text 6"/>
-          <p:cNvSpPr txBox="1"/>
-          <p:nvPr/>
-        </p:nvSpPr>
-        <p:spPr>
-          <a:xfrm>
-            <a:off x="11155680" y="6446520"/>
-            <a:ext cx="457200" cy="292608"/>
-          </a:xfrm>
-          <a:prstGeom prst="rect">
-            <a:avLst/>
-          </a:prstGeom>
-          <a:noFill/>
-          <a:ln/>
-        </p:spPr>
-        <p:txBody>
-          <a:bodyPr wrap="square" lIns="0" tIns="0" rIns="0" bIns="0" rtlCol="0" anchor="ctr"/>
-          <a:lstStyle/>
-          <a:p>
-            <a:pPr algn="r" indent="0" marL="0">
-              <a:buNone/>
-            </a:pPr>
-            <a:r>
-              <a:rPr lang="en-US" sz="900" dirty="0">
-                <a:solidFill>
-                  <a:srgbClr val="5D5D72"/>
-                </a:solidFill>
-                <a:latin typeface="Calibri" pitchFamily="34" charset="0"/>
-                <a:ea typeface="Calibri" pitchFamily="34" charset="-122"/>
-                <a:cs typeface="Calibri" pitchFamily="34" charset="-120"/>
-              </a:rPr>
-              <a:t>7</a:t>
-            </a:r>
-            <a:endParaRPr lang="en-US" sz="900" dirty="0"/>
+          <p:cNvPr id="9" name="cuinotes-footer-mark"/>
+          <p:cNvSpPr txBox="1"/>
+          <p:nvPr/>
+        </p:nvSpPr>
+        <p:spPr>
+          <a:xfrm>
+            <a:off x="9951720" y="6455664"/>
+            <a:ext cx="2011680" cy="292608"/>
+          </a:xfrm>
+          <a:prstGeom prst="rect">
+            <a:avLst/>
+          </a:prstGeom>
+          <a:noFill/>
+        </p:spPr>
+        <p:txBody>
+          <a:bodyPr wrap="none" lIns="0" rIns="0" tIns="0" bIns="0">
+            <a:spAutoFit/>
+          </a:bodyPr>
+          <a:lstStyle/>
+          <a:p>
+            <a:pPr algn="r"/>
+            <a:r>
+              <a:rPr sz="1000">
+                <a:solidFill>
+                  <a:srgbClr val="8A939B"/>
+                </a:solidFill>
+                <a:hlinkClick r:id="rId3"/>
+              </a:rPr>
+              <a:t>cuinotes.com</a:t>
+            </a:r>
+            <a:r>
+              <a:rPr sz="1000">
+                <a:solidFill>
+                  <a:srgbClr val="8A939B"/>
+                </a:solidFill>
+              </a:rPr>
+              <a:t>  ·  7</a:t>
+            </a:r>
           </a:p>
         </p:txBody>
       </p:sp>
@@ -10183,6 +9961,10 @@
           </a:solidFill>
           <a:ln/>
         </p:spPr>
+        <p:txBody>
+          <a:bodyPr/>
+          <a:p/>
+        </p:txBody>
       </p:sp>
       <p:sp>
         <p:nvSpPr>
@@ -10242,6 +10024,10 @@
           </a:solidFill>
           <a:ln/>
         </p:spPr>
+        <p:txBody>
+          <a:bodyPr/>
+          <a:p/>
+        </p:txBody>
       </p:sp>
       <p:sp>
         <p:nvSpPr>
@@ -10301,6 +10087,10 @@
           </a:solidFill>
           <a:ln/>
         </p:spPr>
+        <p:txBody>
+          <a:bodyPr/>
+          <a:p/>
+        </p:txBody>
       </p:sp>
       <p:sp>
         <p:nvSpPr>
@@ -10360,6 +10150,10 @@
           </a:solidFill>
           <a:ln/>
         </p:spPr>
+        <p:txBody>
+          <a:bodyPr/>
+          <a:p/>
+        </p:txBody>
       </p:sp>
       <p:sp>
         <p:nvSpPr>
@@ -10419,6 +10213,10 @@
           </a:solidFill>
           <a:ln/>
         </p:spPr>
+        <p:txBody>
+          <a:bodyPr/>
+          <a:p/>
+        </p:txBody>
       </p:sp>
       <p:sp>
         <p:nvSpPr>
@@ -10478,6 +10276,10 @@
           </a:solidFill>
           <a:ln/>
         </p:spPr>
+        <p:txBody>
+          <a:bodyPr/>
+          <a:p/>
+        </p:txBody>
       </p:sp>
       <p:sp>
         <p:nvSpPr>
@@ -10520,79 +10322,44 @@
       </p:sp>
       <p:sp>
         <p:nvSpPr>
-          <p:cNvPr id="16" name="Text 14"/>
-          <p:cNvSpPr txBox="1"/>
-          <p:nvPr/>
-        </p:nvSpPr>
-        <p:spPr>
-          <a:xfrm>
-            <a:off x="640080" y="6446520"/>
-            <a:ext cx="8686800" cy="292608"/>
-          </a:xfrm>
-          <a:prstGeom prst="rect">
-            <a:avLst/>
-          </a:prstGeom>
-          <a:noFill/>
-          <a:ln/>
-        </p:spPr>
-        <p:txBody>
-          <a:bodyPr wrap="square" lIns="0" tIns="0" rIns="0" bIns="0" rtlCol="0" anchor="ctr"/>
-          <a:lstStyle/>
-          <a:p>
-            <a:pPr algn="l" indent="0" marL="0">
-              <a:buNone/>
-            </a:pPr>
-            <a:r>
-              <a:rPr lang="en-US" sz="900" dirty="0">
-                <a:solidFill>
-                  <a:srgbClr val="5D5D72"/>
-                </a:solidFill>
-                <a:latin typeface="Calibri" pitchFamily="34" charset="0"/>
-                <a:ea typeface="Calibri" pitchFamily="34" charset="-122"/>
-                <a:cs typeface="Calibri" pitchFamily="34" charset="-120"/>
-              </a:rPr>
-              <a:t>Usman Akram  •  COMSATS University Islamabad</a:t>
-            </a:r>
-            <a:endParaRPr lang="en-US" sz="900" dirty="0"/>
-          </a:p>
-        </p:txBody>
-      </p:sp>
-      <p:sp>
-        <p:nvSpPr>
-          <p:cNvPr id="17" name="Text 15"/>
-          <p:cNvSpPr txBox="1"/>
-          <p:nvPr/>
-        </p:nvSpPr>
-        <p:spPr>
-          <a:xfrm>
-            <a:off x="11155680" y="6446520"/>
-            <a:ext cx="457200" cy="292608"/>
-          </a:xfrm>
-          <a:prstGeom prst="rect">
-            <a:avLst/>
-          </a:prstGeom>
-          <a:noFill/>
-          <a:ln/>
-        </p:spPr>
-        <p:txBody>
-          <a:bodyPr wrap="square" lIns="0" tIns="0" rIns="0" bIns="0" rtlCol="0" anchor="ctr"/>
-          <a:lstStyle/>
-          <a:p>
-            <a:pPr algn="r" indent="0" marL="0">
-              <a:buNone/>
-            </a:pPr>
-            <a:r>
-              <a:rPr lang="en-US" sz="900" dirty="0">
-                <a:solidFill>
-                  <a:srgbClr val="5D5D72"/>
-                </a:solidFill>
-                <a:latin typeface="Calibri" pitchFamily="34" charset="0"/>
-                <a:ea typeface="Calibri" pitchFamily="34" charset="-122"/>
-                <a:cs typeface="Calibri" pitchFamily="34" charset="-120"/>
-              </a:rPr>
-              <a:t>8</a:t>
-            </a:r>
-            <a:endParaRPr lang="en-US" sz="900" dirty="0"/>
+          <p:cNvPr id="18" name="cuinotes-footer-mark"/>
+          <p:cNvSpPr txBox="1"/>
+          <p:nvPr/>
+        </p:nvSpPr>
+        <p:spPr>
+          <a:xfrm>
+            <a:off x="9951720" y="6455664"/>
+            <a:ext cx="2011680" cy="292608"/>
+          </a:xfrm>
+          <a:prstGeom prst="rect">
+            <a:avLst/>
+          </a:prstGeom>
+          <a:noFill/>
+        </p:spPr>
+        <p:txBody>
+          <a:bodyPr wrap="none" lIns="0" rIns="0" tIns="0" bIns="0">
+            <a:spAutoFit/>
+          </a:bodyPr>
+          <a:lstStyle/>
+          <a:p>
+            <a:pPr algn="r"/>
+            <a:r>
+              <a:rPr sz="1000">
+                <a:solidFill>
+                  <a:srgbClr val="8A939B"/>
+                </a:solidFill>
+                <a:hlinkClick r:id="rId3"/>
+              </a:rPr>
+              <a:t>cuinotes.com</a:t>
+            </a:r>
+            <a:r>
+              <a:rPr sz="1000">
+                <a:solidFill>
+                  <a:srgbClr val="8A939B"/>
+                </a:solidFill>
+              </a:rPr>
+              <a:t>  ·  8</a:t>
+            </a:r>
           </a:p>
         </p:txBody>
       </p:sp>
@@ -10732,6 +10499,10 @@
             <a:prstDash val="solid"/>
           </a:ln>
         </p:spPr>
+        <p:txBody>
+          <a:bodyPr/>
+          <a:p/>
+        </p:txBody>
       </p:sp>
       <p:sp>
         <p:nvSpPr>
@@ -10813,79 +10584,44 @@
       </p:sp>
       <p:sp>
         <p:nvSpPr>
-          <p:cNvPr id="7" name="Text 5"/>
-          <p:cNvSpPr txBox="1"/>
-          <p:nvPr/>
-        </p:nvSpPr>
-        <p:spPr>
-          <a:xfrm>
-            <a:off x="640080" y="6446520"/>
-            <a:ext cx="8686800" cy="292608"/>
-          </a:xfrm>
-          <a:prstGeom prst="rect">
-            <a:avLst/>
-          </a:prstGeom>
-          <a:noFill/>
-          <a:ln/>
-        </p:spPr>
-        <p:txBody>
-          <a:bodyPr wrap="square" lIns="0" tIns="0" rIns="0" bIns="0" rtlCol="0" anchor="ctr"/>
-          <a:lstStyle/>
-          <a:p>
-            <a:pPr algn="l" indent="0" marL="0">
-              <a:buNone/>
-            </a:pPr>
-            <a:r>
-              <a:rPr lang="en-US" sz="900" dirty="0">
-                <a:solidFill>
-                  <a:srgbClr val="5D5D72"/>
-                </a:solidFill>
-                <a:latin typeface="Calibri" pitchFamily="34" charset="0"/>
-                <a:ea typeface="Calibri" pitchFamily="34" charset="-122"/>
-                <a:cs typeface="Calibri" pitchFamily="34" charset="-120"/>
-              </a:rPr>
-              <a:t>Usman Akram  •  COMSATS University Islamabad</a:t>
-            </a:r>
-            <a:endParaRPr lang="en-US" sz="900" dirty="0"/>
-          </a:p>
-        </p:txBody>
-      </p:sp>
-      <p:sp>
-        <p:nvSpPr>
-          <p:cNvPr id="8" name="Text 6"/>
-          <p:cNvSpPr txBox="1"/>
-          <p:nvPr/>
-        </p:nvSpPr>
-        <p:spPr>
-          <a:xfrm>
-            <a:off x="11155680" y="6446520"/>
-            <a:ext cx="457200" cy="292608"/>
-          </a:xfrm>
-          <a:prstGeom prst="rect">
-            <a:avLst/>
-          </a:prstGeom>
-          <a:noFill/>
-          <a:ln/>
-        </p:spPr>
-        <p:txBody>
-          <a:bodyPr wrap="square" lIns="0" tIns="0" rIns="0" bIns="0" rtlCol="0" anchor="ctr"/>
-          <a:lstStyle/>
-          <a:p>
-            <a:pPr algn="r" indent="0" marL="0">
-              <a:buNone/>
-            </a:pPr>
-            <a:r>
-              <a:rPr lang="en-US" sz="900" dirty="0">
-                <a:solidFill>
-                  <a:srgbClr val="5D5D72"/>
-                </a:solidFill>
-                <a:latin typeface="Calibri" pitchFamily="34" charset="0"/>
-                <a:ea typeface="Calibri" pitchFamily="34" charset="-122"/>
-                <a:cs typeface="Calibri" pitchFamily="34" charset="-120"/>
-              </a:rPr>
-              <a:t>9</a:t>
-            </a:r>
-            <a:endParaRPr lang="en-US" sz="900" dirty="0"/>
+          <p:cNvPr id="9" name="cuinotes-footer-mark"/>
+          <p:cNvSpPr txBox="1"/>
+          <p:nvPr/>
+        </p:nvSpPr>
+        <p:spPr>
+          <a:xfrm>
+            <a:off x="9951720" y="6455664"/>
+            <a:ext cx="2011680" cy="292608"/>
+          </a:xfrm>
+          <a:prstGeom prst="rect">
+            <a:avLst/>
+          </a:prstGeom>
+          <a:noFill/>
+        </p:spPr>
+        <p:txBody>
+          <a:bodyPr wrap="none" lIns="0" rIns="0" tIns="0" bIns="0">
+            <a:spAutoFit/>
+          </a:bodyPr>
+          <a:lstStyle/>
+          <a:p>
+            <a:pPr algn="r"/>
+            <a:r>
+              <a:rPr sz="1000">
+                <a:solidFill>
+                  <a:srgbClr val="8A939B"/>
+                </a:solidFill>
+                <a:hlinkClick r:id="rId3"/>
+              </a:rPr>
+              <a:t>cuinotes.com</a:t>
+            </a:r>
+            <a:r>
+              <a:rPr sz="1000">
+                <a:solidFill>
+                  <a:srgbClr val="8A939B"/>
+                </a:solidFill>
+              </a:rPr>
+              <a:t>  ·  9</a:t>
+            </a:r>
           </a:p>
         </p:txBody>
       </p:sp>

--- a/slides/CSC336-Lecture-17-Midterm-Review.pptx
+++ b/slides/CSC336-Lecture-17-Midterm-Review.pptx
@@ -3062,7 +3062,7 @@
         <p:spPr>
           <a:xfrm>
             <a:off x="640080" y="1965960"/>
-            <a:ext cx="10911535" cy="1737360"/>
+            <a:ext cx="10911535" cy="3657600"/>
           </a:xfrm>
           <a:prstGeom prst="roundRect">
             <a:avLst>
@@ -3093,7 +3093,7 @@
         <p:spPr>
           <a:xfrm>
             <a:off x="868680" y="2103120"/>
-            <a:ext cx="10454335" cy="274320"/>
+            <a:ext cx="10454335" cy="400000"/>
           </a:xfrm>
           <a:prstGeom prst="rect">
             <a:avLst/>
@@ -3109,7 +3109,7 @@
               <a:buNone/>
             </a:pPr>
             <a:r>
-              <a:rPr lang="en-US" sz="1000" b="1" spc="200" kern="0" dirty="0">
+              <a:rPr lang="en-US" sz="1800" b="1" spc="200" kern="0" dirty="0">
                 <a:solidFill>
                   <a:srgbClr val="8A3A12"/>
                 </a:solidFill>
@@ -3119,7 +3119,7 @@
               </a:rPr>
               <a:t>WARNING</a:t>
             </a:r>
-            <a:endParaRPr lang="en-US" sz="1000" dirty="0"/>
+            <a:endParaRPr lang="en-US" sz="1800" dirty="0"/>
           </a:p>
         </p:txBody>
       </p:sp>
@@ -3131,24 +3131,24 @@
         </p:nvSpPr>
         <p:spPr>
           <a:xfrm>
-            <a:off x="868680" y="2404872"/>
-            <a:ext cx="10454335" cy="1143000"/>
-          </a:xfrm>
-          <a:prstGeom prst="rect">
-            <a:avLst/>
-          </a:prstGeom>
-          <a:noFill/>
-          <a:ln/>
-        </p:spPr>
-        <p:txBody>
-          <a:bodyPr wrap="square" lIns="0" tIns="0" rIns="0" bIns="0" rtlCol="0" anchor="t"/>
+            <a:off x="868680" y="2795960"/>
+            <a:ext cx="10454335" cy="2500000"/>
+          </a:xfrm>
+          <a:prstGeom prst="rect">
+            <a:avLst/>
+          </a:prstGeom>
+          <a:noFill/>
+          <a:ln/>
+        </p:spPr>
+        <p:txBody>
+          <a:bodyPr wrap="square" lIns="0" tIns="0" rIns="0" bIns="0" rtlCol="0" anchor="ctr"/>
           <a:lstStyle/>
           <a:p>
             <a:pPr indent="0" marL="0">
               <a:buNone/>
             </a:pPr>
             <a:r>
-              <a:rPr lang="en-US" sz="1250" dirty="0">
+              <a:rPr lang="en-US" sz="2800" dirty="0">
                 <a:solidFill>
                   <a:srgbClr val="26262F"/>
                 </a:solidFill>
@@ -3158,7 +3158,7 @@
               </a:rPr>
               <a:t>async/await is still promise-based under the hood -- a function marked async always returns a promise, and await only works inside an async function (or at a module's top level). Forgetting to await a promise is one of the most common async bugs.</a:t>
             </a:r>
-            <a:endParaRPr lang="en-US" sz="1250" dirty="0"/>
+            <a:endParaRPr lang="en-US" sz="2800" dirty="0"/>
           </a:p>
         </p:txBody>
       </p:sp>
@@ -8959,7 +8959,7 @@
         <p:spPr>
           <a:xfrm>
             <a:off x="640080" y="1965960"/>
-            <a:ext cx="10911535" cy="1554480"/>
+            <a:ext cx="10911535" cy="3657600"/>
           </a:xfrm>
           <a:prstGeom prst="roundRect">
             <a:avLst>
@@ -8990,7 +8990,7 @@
         <p:spPr>
           <a:xfrm>
             <a:off x="868680" y="2103120"/>
-            <a:ext cx="10454335" cy="274320"/>
+            <a:ext cx="10454335" cy="400000"/>
           </a:xfrm>
           <a:prstGeom prst="rect">
             <a:avLst/>
@@ -9006,7 +9006,7 @@
               <a:buNone/>
             </a:pPr>
             <a:r>
-              <a:rPr lang="en-US" sz="1000" b="1" spc="200" kern="0" dirty="0">
+              <a:rPr lang="en-US" sz="1800" b="1" spc="200" kern="0" dirty="0">
                 <a:solidFill>
                   <a:srgbClr val="8A3A12"/>
                 </a:solidFill>
@@ -9016,7 +9016,7 @@
               </a:rPr>
               <a:t>WARNING</a:t>
             </a:r>
-            <a:endParaRPr lang="en-US" sz="1000" dirty="0"/>
+            <a:endParaRPr lang="en-US" sz="1800" dirty="0"/>
           </a:p>
         </p:txBody>
       </p:sp>
@@ -9028,24 +9028,24 @@
         </p:nvSpPr>
         <p:spPr>
           <a:xfrm>
-            <a:off x="868680" y="2404872"/>
-            <a:ext cx="10454335" cy="960120"/>
-          </a:xfrm>
-          <a:prstGeom prst="rect">
-            <a:avLst/>
-          </a:prstGeom>
-          <a:noFill/>
-          <a:ln/>
-        </p:spPr>
-        <p:txBody>
-          <a:bodyPr wrap="square" lIns="0" tIns="0" rIns="0" bIns="0" rtlCol="0" anchor="t"/>
+            <a:off x="868680" y="2795960"/>
+            <a:ext cx="10454335" cy="2500000"/>
+          </a:xfrm>
+          <a:prstGeom prst="rect">
+            <a:avLst/>
+          </a:prstGeom>
+          <a:noFill/>
+          <a:ln/>
+        </p:spPr>
+        <p:txBody>
+          <a:bodyPr wrap="square" lIns="0" tIns="0" rIns="0" bIns="0" rtlCol="0" anchor="ctr"/>
           <a:lstStyle/>
           <a:p>
             <a:pPr indent="0" marL="0">
               <a:buNone/>
             </a:pPr>
             <a:r>
-              <a:rPr lang="en-US" sz="1250" dirty="0">
+              <a:rPr lang="en-US" sz="2800" dirty="0">
                 <a:solidFill>
                   <a:srgbClr val="26262F"/>
                 </a:solidFill>
@@ -9055,7 +9055,7 @@
               </a:rPr>
               <a:t>Students often say "the Internet" when they mean "the Web," and confuse a web server (software) with the physical machine it runs on. Be precise with this vocabulary on the exam.</a:t>
             </a:r>
-            <a:endParaRPr lang="en-US" sz="1250" dirty="0"/>
+            <a:endParaRPr lang="en-US" sz="2800" dirty="0"/>
           </a:p>
         </p:txBody>
       </p:sp>
@@ -9689,7 +9689,7 @@
         <p:spPr>
           <a:xfrm>
             <a:off x="640080" y="1965960"/>
-            <a:ext cx="10911535" cy="1554480"/>
+            <a:ext cx="10911535" cy="3657600"/>
           </a:xfrm>
           <a:prstGeom prst="roundRect">
             <a:avLst>
@@ -9720,7 +9720,7 @@
         <p:spPr>
           <a:xfrm>
             <a:off x="868680" y="2103120"/>
-            <a:ext cx="10454335" cy="274320"/>
+            <a:ext cx="10454335" cy="400000"/>
           </a:xfrm>
           <a:prstGeom prst="rect">
             <a:avLst/>
@@ -9736,7 +9736,7 @@
               <a:buNone/>
             </a:pPr>
             <a:r>
-              <a:rPr lang="en-US" sz="1000" b="1" spc="200" kern="0" dirty="0">
+              <a:rPr lang="en-US" sz="1800" b="1" spc="200" kern="0" dirty="0">
                 <a:solidFill>
                   <a:srgbClr val="8A3A12"/>
                 </a:solidFill>
@@ -9746,7 +9746,7 @@
               </a:rPr>
               <a:t>WARNING</a:t>
             </a:r>
-            <a:endParaRPr lang="en-US" sz="1000" dirty="0"/>
+            <a:endParaRPr lang="en-US" sz="1800" dirty="0"/>
           </a:p>
         </p:txBody>
       </p:sp>
@@ -9758,24 +9758,24 @@
         </p:nvSpPr>
         <p:spPr>
           <a:xfrm>
-            <a:off x="868680" y="2404872"/>
-            <a:ext cx="10454335" cy="960120"/>
-          </a:xfrm>
-          <a:prstGeom prst="rect">
-            <a:avLst/>
-          </a:prstGeom>
-          <a:noFill/>
-          <a:ln/>
-        </p:spPr>
-        <p:txBody>
-          <a:bodyPr wrap="square" lIns="0" tIns="0" rIns="0" bIns="0" rtlCol="0" anchor="t"/>
+            <a:off x="868680" y="2795960"/>
+            <a:ext cx="10454335" cy="2500000"/>
+          </a:xfrm>
+          <a:prstGeom prst="rect">
+            <a:avLst/>
+          </a:prstGeom>
+          <a:noFill/>
+          <a:ln/>
+        </p:spPr>
+        <p:txBody>
+          <a:bodyPr wrap="square" lIns="0" tIns="0" rIns="0" bIns="0" rtlCol="0" anchor="ctr"/>
           <a:lstStyle/>
           <a:p>
             <a:pPr indent="0" marL="0">
               <a:buNone/>
             </a:pPr>
             <a:r>
-              <a:rPr lang="en-US" sz="1250" dirty="0">
+              <a:rPr lang="en-US" sz="2800" dirty="0">
                 <a:solidFill>
                   <a:srgbClr val="26262F"/>
                 </a:solidFill>
@@ -9785,7 +9785,7 @@
               </a:rPr>
               <a:t>"Semantic" does not mean "styled differently by default" -- most semantic elements look like a plain &lt;div&gt; until you add CSS. Their value is in meaning, not looks.</a:t>
             </a:r>
-            <a:endParaRPr lang="en-US" sz="1250" dirty="0"/>
+            <a:endParaRPr lang="en-US" sz="2800" dirty="0"/>
           </a:p>
         </p:txBody>
       </p:sp>
@@ -10482,7 +10482,7 @@
         <p:spPr>
           <a:xfrm>
             <a:off x="640080" y="1965960"/>
-            <a:ext cx="10911535" cy="1737360"/>
+            <a:ext cx="10911535" cy="3657600"/>
           </a:xfrm>
           <a:prstGeom prst="roundRect">
             <a:avLst>
@@ -10513,7 +10513,7 @@
         <p:spPr>
           <a:xfrm>
             <a:off x="868680" y="2103120"/>
-            <a:ext cx="10454335" cy="274320"/>
+            <a:ext cx="10454335" cy="400000"/>
           </a:xfrm>
           <a:prstGeom prst="rect">
             <a:avLst/>
@@ -10529,7 +10529,7 @@
               <a:buNone/>
             </a:pPr>
             <a:r>
-              <a:rPr lang="en-US" sz="1000" b="1" spc="200" kern="0" dirty="0">
+              <a:rPr lang="en-US" sz="1800" b="1" spc="200" kern="0" dirty="0">
                 <a:solidFill>
                   <a:srgbClr val="8A3A12"/>
                 </a:solidFill>
@@ -10539,7 +10539,7 @@
               </a:rPr>
               <a:t>WARNING</a:t>
             </a:r>
-            <a:endParaRPr lang="en-US" sz="1000" dirty="0"/>
+            <a:endParaRPr lang="en-US" sz="1800" dirty="0"/>
           </a:p>
         </p:txBody>
       </p:sp>
@@ -10551,24 +10551,24 @@
         </p:nvSpPr>
         <p:spPr>
           <a:xfrm>
-            <a:off x="868680" y="2404872"/>
-            <a:ext cx="10454335" cy="1143000"/>
-          </a:xfrm>
-          <a:prstGeom prst="rect">
-            <a:avLst/>
-          </a:prstGeom>
-          <a:noFill/>
-          <a:ln/>
-        </p:spPr>
-        <p:txBody>
-          <a:bodyPr wrap="square" lIns="0" tIns="0" rIns="0" bIns="0" rtlCol="0" anchor="t"/>
+            <a:off x="868680" y="2795960"/>
+            <a:ext cx="10454335" cy="2500000"/>
+          </a:xfrm>
+          <a:prstGeom prst="rect">
+            <a:avLst/>
+          </a:prstGeom>
+          <a:noFill/>
+          <a:ln/>
+        </p:spPr>
+        <p:txBody>
+          <a:bodyPr wrap="square" lIns="0" tIns="0" rIns="0" bIns="0" rtlCol="0" anchor="ctr"/>
           <a:lstStyle/>
           <a:p>
             <a:pPr indent="0" marL="0">
               <a:buNone/>
             </a:pPr>
             <a:r>
-              <a:rPr lang="en-US" sz="1250" dirty="0">
+              <a:rPr lang="en-US" sz="2800" dirty="0">
                 <a:solidFill>
                   <a:srgbClr val="26262F"/>
                 </a:solidFill>
@@ -10578,7 +10578,7 @@
               </a:rPr>
               <a:t>Margin collapsing (adjacent vertical margins combining into one) and the difference between justify-content (main axis) vs. align-items (cross axis) in Flexbox are two of the most frequently missed exam points.</a:t>
             </a:r>
-            <a:endParaRPr lang="en-US" sz="1250" dirty="0"/>
+            <a:endParaRPr lang="en-US" sz="2800" dirty="0"/>
           </a:p>
         </p:txBody>
       </p:sp>
